--- a/downloads/DCT_V2_Ch02_Slides.pptx
+++ b/downloads/DCT_V2_Ch02_Slides.pptx
@@ -130,7 +130,7 @@
   <p:extLst>
     <p:ext uri="{521415D9-36F7-43E2-AB2F-B90AF26B5E84}">
       <p14:sectionLst xmlns:p14="http://schemas.microsoft.com/office/powerpoint/2010/main">
-        <p14:section name="Opening" id="{27472963-ed38-dd67-20a0-fc520634a560}">
+        <p14:section name="Opening" id="{7618864c-f3f2-0625-f431-c1f3e020a779}">
           <p14:sldIdLst>
             <p14:sldId id="256"/>
             <p14:sldId id="257"/>
@@ -138,46 +138,46 @@
             <p14:sldId id="259"/>
           </p14:sldIdLst>
         </p14:section>
-        <p14:section name="2.1 From Problem to Instance" id="{c466c2bc-2522-4f5d-d6ae-0cc29fc6d812}">
+        <p14:section name="2.1 From Problem to Instance" id="{80825c3a-1943-bbdc-cfa7-dc8db7fa9981}">
           <p14:sldIdLst>
             <p14:sldId id="260"/>
             <p14:sldId id="261"/>
           </p14:sldIdLst>
         </p14:section>
-        <p14:section name="2.2 What Is Chosen and What Is Induced" id="{31ac448d-3775-4b6a-cec7-265117b61cae}">
+        <p14:section name="2.2 What Is Chosen and What Is Induced" id="{4297b35d-8ce4-984d-8ae9-c4571cd71bd8}">
           <p14:sldIdLst>
             <p14:sldId id="262"/>
           </p14:sldIdLst>
         </p14:section>
-        <p14:section name="2.3 Objectives: Form Is Free, Content Is Governance" id="{f5806dfa-0c93-d288-e825-3d7c97007c0c}">
+        <p14:section name="2.3 Objectives: Form Is Free, Content Is Governance" id="{323d3bee-f2d8-396f-5619-a5d4d6e5b3c0}">
           <p14:sldIdLst>
             <p14:sldId id="263"/>
             <p14:sldId id="264"/>
           </p14:sldIdLst>
         </p14:section>
-        <p14:section name="2.4 Commitments and How They Hold" id="{359b7f94-7f10-2ecb-dc5b-823f5cc9face}">
+        <p14:section name="2.4 Commitments and How They Hold" id="{b55ce963-1712-92c5-6eee-60ae4b9d3030}">
           <p14:sldIdLst>
             <p14:sldId id="265"/>
           </p14:sldIdLst>
         </p14:section>
-        <p14:section name="2.5 Feasibility, Computed" id="{4ce67959-8dff-b118-f5a7-86fb7367dced}">
+        <p14:section name="2.5 Feasibility, Computed" id="{3a69e9e4-a768-6f63-29c8-d4a836b57301}">
           <p14:sldIdLst>
             <p14:sldId id="266"/>
             <p14:sldId id="267"/>
           </p14:sldIdLst>
         </p14:section>
-        <p14:section name="2.6 Classes, Architecture, and the Warranty" id="{33b99e11-cc95-d9af-5b2d-208cf8e4ddba}">
+        <p14:section name="2.6 Classes, Architecture, and the Warranty" id="{7e351113-28ef-8f30-c306-52a7aca7d5db}">
           <p14:sldIdLst>
             <p14:sldId id="268"/>
             <p14:sldId id="269"/>
           </p14:sldIdLst>
         </p14:section>
-        <p14:section name="2.7 Preparing an Instance for a Solver" id="{8894ddf5-3d76-dc80-f7e3-d02f3fcbe1dc}">
+        <p14:section name="2.7 Preparing an Instance for a Solver" id="{570744d3-10ce-3dc9-99a2-94647ffa98a1}">
           <p14:sldIdLst>
             <p14:sldId id="270"/>
           </p14:sldIdLst>
         </p14:section>
-        <p14:section name="Worked Example 2.1" id="{00c98c1d-65fa-8258-bfa5-c7723558ffe6}">
+        <p14:section name="Worked Example 2.1" id="{cd29ce40-c4af-465b-0009-3b715627c760}">
           <p14:sldIdLst>
             <p14:sldId id="271"/>
             <p14:sldId id="272"/>
@@ -186,12 +186,12 @@
             <p14:sldId id="275"/>
           </p14:sldIdLst>
         </p14:section>
-        <p14:section name="AXIOM Lab 2.2" id="{c8f2554c-bd5a-4365-72c2-b94021bd8cf8}">
+        <p14:section name="AXIOM Lab 2.2" id="{f5aa30ba-537e-d3af-34df-6e13b87956ef}">
           <p14:sldIdLst>
             <p14:sldId id="276"/>
           </p14:sldIdLst>
         </p14:section>
-        <p14:section name="Close" id="{0ca0eefb-34d3-ab89-f494-9b521f27bf82}">
+        <p14:section name="Close" id="{6a0ca74c-a09c-f2b6-2c96-45c21df1997f}">
           <p14:sldIdLst>
             <p14:sldId id="277"/>
             <p14:sldId id="278"/>

--- a/downloads/DCT_V2_Ch02_Slides.pptx
+++ b/downloads/DCT_V2_Ch02_Slides.pptx
@@ -130,7 +130,7 @@
   <p:extLst>
     <p:ext uri="{521415D9-36F7-43E2-AB2F-B90AF26B5E84}">
       <p14:sectionLst xmlns:p14="http://schemas.microsoft.com/office/powerpoint/2010/main">
-        <p14:section name="Opening" id="{7618864c-f3f2-0625-f431-c1f3e020a779}">
+        <p14:section name="Opening" id="{02a3b58b-1195-f5ba-2dd1-529f011ec48f}">
           <p14:sldIdLst>
             <p14:sldId id="256"/>
             <p14:sldId id="257"/>
@@ -138,46 +138,46 @@
             <p14:sldId id="259"/>
           </p14:sldIdLst>
         </p14:section>
-        <p14:section name="2.1 From Problem to Instance" id="{80825c3a-1943-bbdc-cfa7-dc8db7fa9981}">
+        <p14:section name="2.1 From Problem to Instance" id="{63039358-4cea-9e55-79b7-a8e6dcfc7e93}">
           <p14:sldIdLst>
             <p14:sldId id="260"/>
             <p14:sldId id="261"/>
           </p14:sldIdLst>
         </p14:section>
-        <p14:section name="2.2 What Is Chosen and What Is Induced" id="{4297b35d-8ce4-984d-8ae9-c4571cd71bd8}">
+        <p14:section name="2.2 What Is Chosen and What Is Induced" id="{a13e1249-a349-8b9b-5cb6-f1b7a3ed79e2}">
           <p14:sldIdLst>
             <p14:sldId id="262"/>
           </p14:sldIdLst>
         </p14:section>
-        <p14:section name="2.3 Objectives: Form Is Free, Content Is Governance" id="{323d3bee-f2d8-396f-5619-a5d4d6e5b3c0}">
+        <p14:section name="2.3 Objectives: Form Is Free, Content Is Governance" id="{1ebffe88-abfe-2e8f-1526-938d0ec0477b}">
           <p14:sldIdLst>
             <p14:sldId id="263"/>
             <p14:sldId id="264"/>
           </p14:sldIdLst>
         </p14:section>
-        <p14:section name="2.4 Commitments and How They Hold" id="{b55ce963-1712-92c5-6eee-60ae4b9d3030}">
+        <p14:section name="2.4 Commitments and How They Hold" id="{eb48525c-1891-08e7-6963-279172efae80}">
           <p14:sldIdLst>
             <p14:sldId id="265"/>
           </p14:sldIdLst>
         </p14:section>
-        <p14:section name="2.5 Feasibility, Computed" id="{3a69e9e4-a768-6f63-29c8-d4a836b57301}">
+        <p14:section name="2.5 Feasibility, Computed" id="{163b1738-4de6-33bb-a50f-84842f00c04a}">
           <p14:sldIdLst>
             <p14:sldId id="266"/>
             <p14:sldId id="267"/>
           </p14:sldIdLst>
         </p14:section>
-        <p14:section name="2.6 Classes, Architecture, and the Warranty" id="{7e351113-28ef-8f30-c306-52a7aca7d5db}">
+        <p14:section name="2.6 Classes, Architecture, and the Warranty" id="{45cf3083-a4f3-ca2f-9768-e188a195019e}">
           <p14:sldIdLst>
             <p14:sldId id="268"/>
             <p14:sldId id="269"/>
           </p14:sldIdLst>
         </p14:section>
-        <p14:section name="2.7 Preparing an Instance for a Solver" id="{570744d3-10ce-3dc9-99a2-94647ffa98a1}">
+        <p14:section name="2.7 Preparing an Instance for a Solver" id="{bb1ce217-9680-281d-42b3-f780aabc4ad7}">
           <p14:sldIdLst>
             <p14:sldId id="270"/>
           </p14:sldIdLst>
         </p14:section>
-        <p14:section name="Worked Example 2.1" id="{cd29ce40-c4af-465b-0009-3b715627c760}">
+        <p14:section name="Worked Example 2.1" id="{bb6c4e62-5467-f617-f322-51b3074b2027}">
           <p14:sldIdLst>
             <p14:sldId id="271"/>
             <p14:sldId id="272"/>
@@ -186,12 +186,12 @@
             <p14:sldId id="275"/>
           </p14:sldIdLst>
         </p14:section>
-        <p14:section name="AXIOM Lab 2.2" id="{f5aa30ba-537e-d3af-34df-6e13b87956ef}">
+        <p14:section name="AXIOM Lab 2.2" id="{2085c0a9-7509-cac2-c69f-bb34b683db51}">
           <p14:sldIdLst>
             <p14:sldId id="276"/>
           </p14:sldIdLst>
         </p14:section>
-        <p14:section name="Close" id="{6a0ca74c-a09c-f2b6-2c96-45c21df1997f}">
+        <p14:section name="Close" id="{c32c7a13-685f-8481-bc01-56d8093a4fa8}">
           <p14:sldIdLst>
             <p14:sldId id="277"/>
             <p14:sldId id="278"/>

--- a/downloads/DCT_V2_Ch02_Slides.pptx
+++ b/downloads/DCT_V2_Ch02_Slides.pptx
@@ -29,9 +29,10 @@
     <p:sldId id="277" r:id="rId23"/>
     <p:sldId id="278" r:id="rId24"/>
     <p:sldId id="279" r:id="rId25"/>
+    <p:sldId id="280" r:id="rId26"/>
   </p:sldIdLst>
   <p:notesMasterIdLst>
-    <p:notesMasterId r:id="rId26"/>
+    <p:notesMasterId r:id="rId27"/>
   </p:notesMasterIdLst>
   <p:sldSz cx="12192000" cy="6858000"/>
   <p:notesSz cx="6858000" cy="12192000"/>
@@ -130,7 +131,7 @@
   <p:extLst>
     <p:ext uri="{521415D9-36F7-43E2-AB2F-B90AF26B5E84}">
       <p14:sectionLst xmlns:p14="http://schemas.microsoft.com/office/powerpoint/2010/main">
-        <p14:section name="Opening" id="{02a3b58b-1195-f5ba-2dd1-529f011ec48f}">
+        <p14:section name="Opening" id="{8fe12fea-7d90-975e-8d5e-1ae5c229c927}">
           <p14:sldIdLst>
             <p14:sldId id="256"/>
             <p14:sldId id="257"/>
@@ -138,46 +139,46 @@
             <p14:sldId id="259"/>
           </p14:sldIdLst>
         </p14:section>
-        <p14:section name="2.1 From Problem to Instance" id="{63039358-4cea-9e55-79b7-a8e6dcfc7e93}">
+        <p14:section name="2.1 From Problem to Instance" id="{c73b1323-b51d-1c98-79a6-dae0da033f02}">
           <p14:sldIdLst>
             <p14:sldId id="260"/>
             <p14:sldId id="261"/>
           </p14:sldIdLst>
         </p14:section>
-        <p14:section name="2.2 What Is Chosen and What Is Induced" id="{a13e1249-a349-8b9b-5cb6-f1b7a3ed79e2}">
+        <p14:section name="2.2 What Is Chosen and What Is Induced" id="{47eb3686-573b-09c2-fa31-f8d5df47f031}">
           <p14:sldIdLst>
             <p14:sldId id="262"/>
           </p14:sldIdLst>
         </p14:section>
-        <p14:section name="2.3 Objectives: Form Is Free, Content Is Governance" id="{1ebffe88-abfe-2e8f-1526-938d0ec0477b}">
+        <p14:section name="2.3 Objectives: Form Is Free, Content Is Governance" id="{4d4fb9a7-63fd-ef16-e98c-03ddf5452764}">
           <p14:sldIdLst>
             <p14:sldId id="263"/>
             <p14:sldId id="264"/>
           </p14:sldIdLst>
         </p14:section>
-        <p14:section name="2.4 Commitments and How They Hold" id="{eb48525c-1891-08e7-6963-279172efae80}">
+        <p14:section name="2.4 Commitments and How They Hold" id="{aa181548-dbd3-67c8-13bd-88b8f712fa05}">
           <p14:sldIdLst>
             <p14:sldId id="265"/>
           </p14:sldIdLst>
         </p14:section>
-        <p14:section name="2.5 Feasibility, Computed" id="{163b1738-4de6-33bb-a50f-84842f00c04a}">
+        <p14:section name="2.5 Feasibility, Computed" id="{be108d25-a603-f405-88be-664533a216bf}">
           <p14:sldIdLst>
             <p14:sldId id="266"/>
             <p14:sldId id="267"/>
           </p14:sldIdLst>
         </p14:section>
-        <p14:section name="2.6 Classes, Architecture, and the Warranty" id="{45cf3083-a4f3-ca2f-9768-e188a195019e}">
+        <p14:section name="2.6 Classes, Architecture, and the Warranty" id="{0ef79b2a-096e-f006-e99e-905911055d25}">
           <p14:sldIdLst>
             <p14:sldId id="268"/>
             <p14:sldId id="269"/>
           </p14:sldIdLst>
         </p14:section>
-        <p14:section name="2.7 Preparing an Instance for a Solver" id="{bb1ce217-9680-281d-42b3-f780aabc4ad7}">
+        <p14:section name="2.7 Preparing an Instance for a Solver" id="{39531af1-85fe-de5a-2b60-9f4bf0a8ebdd}">
           <p14:sldIdLst>
             <p14:sldId id="270"/>
           </p14:sldIdLst>
         </p14:section>
-        <p14:section name="Worked Example 2.1" id="{bb6c4e62-5467-f617-f322-51b3074b2027}">
+        <p14:section name="Worked Example 2.1" id="{32abd377-3ece-0a1b-5639-d65840a1151f}">
           <p14:sldIdLst>
             <p14:sldId id="271"/>
             <p14:sldId id="272"/>
@@ -186,16 +187,21 @@
             <p14:sldId id="275"/>
           </p14:sldIdLst>
         </p14:section>
-        <p14:section name="AXIOM Lab 2.2" id="{2085c0a9-7509-cac2-c69f-bb34b683db51}">
+        <p14:section name="In Practice" id="{2fd518f6-06ba-10d7-5473-65c1a4f17aab}">
           <p14:sldIdLst>
             <p14:sldId id="276"/>
           </p14:sldIdLst>
         </p14:section>
-        <p14:section name="Close" id="{c32c7a13-685f-8481-bc01-56d8093a4fa8}">
+        <p14:section name="AXIOM Lab 2.2" id="{ba28219a-4cb1-bc3f-84c9-bef62724f105}">
           <p14:sldIdLst>
             <p14:sldId id="277"/>
+          </p14:sldIdLst>
+        </p14:section>
+        <p14:section name="Close" id="{c4a2bde6-5506-ca57-bfbc-d7086a4b98ee}">
+          <p14:sldIdLst>
             <p14:sldId id="278"/>
             <p14:sldId id="279"/>
+            <p14:sldId id="280"/>
           </p14:sldIdLst>
         </p14:section>
       </p14:sectionLst>
@@ -1746,7 +1752,7 @@
           <a:p>
             <a:r>
               <a:rPr lang="en-US" dirty="0"/>
-              <a:t>AXIOM Lab 2.2. What to look for: the refusal of an induced quantity as a decision (Proposition 2.2); two clashes and a repair that must break both, and the year the joint plan dies (Theorem 2.3); a terminal credit that changes the program's size while the Mayer rewrite changes nothing (Theorem 2.1).</a:t>
+              <a:t>In Practice, Chapter 2: Kellogg Declares Its Cereal Network. A real organization's decision of this chapter's kind, told from its published record; every figure is cited in the book. The lesson for Meridian: Priced violations turn infeasibility into information: they show which commitments clash, and by how much. Sources: Brown, Keegan, Vigus and Wood (2001), Interfaces.</a:t>
             </a:r>
             <a:endParaRPr lang="en-US" dirty="0"/>
           </a:p>
@@ -1834,7 +1840,7 @@
           <a:p>
             <a:r>
               <a:rPr lang="en-US" dirty="0"/>
-              <a:t>Key Takeaways, Chapter 2.</a:t>
+              <a:t>AXIOM Lab 2.2. What to look for: the refusal of an induced quantity as a decision (Proposition 2.2); two clashes and a repair that must break both, and the year the joint plan dies (Theorem 2.3); a terminal credit that changes the program's size while the Mayer rewrite changes nothing (Theorem 2.1).</a:t>
             </a:r>
             <a:endParaRPr lang="en-US" dirty="0"/>
           </a:p>
@@ -1922,7 +1928,7 @@
           <a:p>
             <a:r>
               <a:rPr lang="en-US" dirty="0"/>
-              <a:t>The notebook and workbook are on the course website, reached from the book's website, www.dynamiccorporatetransformation.com.</a:t>
+              <a:t>Key Takeaways, Chapter 2.</a:t>
             </a:r>
             <a:endParaRPr lang="en-US" dirty="0"/>
           </a:p>
@@ -2010,7 +2016,7 @@
           <a:p>
             <a:r>
               <a:rPr lang="en-US" dirty="0"/>
-              <a:t>Chapter 3, Convex Enterprise Optimization (chapter abstract). The inequality is weak duality: for any nonnegative prices on the commitments, the Lagrangian's maximum bounds the best value.</a:t>
+              <a:t>The notebook and workbook are on the course website, reached from the book's website, www.dynamiccorporatetransformation.com.</a:t>
             </a:r>
             <a:endParaRPr lang="en-US" dirty="0"/>
           </a:p>
@@ -2034,6 +2040,94 @@
             <a:fld id="{F7021451-1387-4CA6-816F-3879F97B5CBC}" type="slidenum">
               <a:rPr lang="en-US"/>
               <a:t>24</a:t>
+            </a:fld>
+            <a:endParaRPr lang="en-US"/>
+          </a:p>
+        </p:txBody>
+      </p:sp>
+    </p:spTree>
+    <p:extLst>
+      <p:ext uri="{BB962C8B-B14F-4D97-AF65-F5344CB8AC3E}">
+        <p14:creationId xmlns:p14="http://schemas.microsoft.com/office/powerpoint/2010/main" val="1024086991"/>
+      </p:ext>
+    </p:extLst>
+  </p:cSld>
+  <p:clrMapOvr>
+    <a:masterClrMapping/>
+  </p:clrMapOvr>
+</p:notes>
+</file>
+
+<file path=ppt/notesSlides/notesSlide25.xml><?xml version="1.0" encoding="utf-8"?>
+<p:notes xmlns:a="http://schemas.openxmlformats.org/drawingml/2006/main" xmlns:r="http://schemas.openxmlformats.org/officeDocument/2006/relationships" xmlns:p="http://schemas.openxmlformats.org/presentationml/2006/main">
+  <p:cSld>
+    <p:spTree>
+      <p:nvGrpSpPr>
+        <p:cNvPr id="1" name=""/>
+        <p:cNvGrpSpPr/>
+        <p:nvPr/>
+      </p:nvGrpSpPr>
+      <p:grpSpPr>
+        <a:xfrm>
+          <a:off x="0" y="0"/>
+          <a:ext cx="0" cy="0"/>
+          <a:chOff x="0" y="0"/>
+          <a:chExt cx="0" cy="0"/>
+        </a:xfrm>
+      </p:grpSpPr>
+      <p:sp>
+        <p:nvSpPr>
+          <p:cNvPr id="2" name="Slide Image Placeholder 1"/>
+          <p:cNvSpPr>
+            <a:spLocks noGrp="1" noRot="1" noChangeAspect="1"/>
+          </p:cNvSpPr>
+          <p:nvPr>
+            <p:ph type="sldImg"/>
+          </p:nvPr>
+        </p:nvSpPr>
+        <p:spPr/>
+      </p:sp>
+      <p:sp>
+        <p:nvSpPr>
+          <p:cNvPr id="3" name="Notes Placeholder 2"/>
+          <p:cNvSpPr>
+            <a:spLocks noGrp="1"/>
+          </p:cNvSpPr>
+          <p:nvPr>
+            <p:ph type="body" idx="1"/>
+          </p:nvPr>
+        </p:nvSpPr>
+        <p:spPr/>
+        <p:txBody>
+          <a:bodyPr/>
+          <a:lstStyle/>
+          <a:p>
+            <a:r>
+              <a:rPr lang="en-US" dirty="0"/>
+              <a:t>Chapter 3, Convex Enterprise Optimization (chapter abstract). The inequality is weak duality: for any nonnegative prices on the commitments, the Lagrangian's maximum bounds the best value.</a:t>
+            </a:r>
+            <a:endParaRPr lang="en-US" dirty="0"/>
+          </a:p>
+        </p:txBody>
+      </p:sp>
+      <p:sp>
+        <p:nvSpPr>
+          <p:cNvPr id="4" name="Slide Number Placeholder 3"/>
+          <p:cNvSpPr>
+            <a:spLocks noGrp="1"/>
+          </p:cNvSpPr>
+          <p:nvPr>
+            <p:ph type="sldNum" sz="quarter" idx="10"/>
+          </p:nvPr>
+        </p:nvSpPr>
+        <p:spPr/>
+        <p:txBody>
+          <a:bodyPr/>
+          <a:lstStyle/>
+          <a:p>
+            <a:fld id="{F7021451-1387-4CA6-816F-3879F97B5CBC}" type="slidenum">
+              <a:rPr lang="en-US"/>
+              <a:t>25</a:t>
             </a:fld>
             <a:endParaRPr lang="en-US"/>
           </a:p>
@@ -17110,7 +17204,7 @@
                   <a:schemeClr val="accent1"/>
                 </a:solidFill>
               </a:rPr>
-              <a:t>AXIOM LAB 2.2 · MODULE AXIOM-02</a:t>
+              <a:t>IN PRACTICE · KELLOGG</a:t>
             </a:r>
             <a:endParaRPr lang="en-US" sz="1200" dirty="0"/>
           </a:p>
@@ -17151,804 +17245,26 @@
                 <a:ea typeface="Cambria" pitchFamily="34" charset="-122"/>
                 <a:cs typeface="Cambria" pitchFamily="34" charset="-120"/>
               </a:rPr>
-              <a:t>Building and diagnosing an instance, in AXIOM</a:t>
+              <a:t>Kellogg declares its network in blocks</a:t>
             </a:r>
             <a:endParaRPr lang="en-US" sz="3200" dirty="0"/>
           </a:p>
         </p:txBody>
       </p:sp>
-      <p:pic>
-        <p:nvPicPr>
-          <p:cNvPr id="5" name="AXIOM logo" descr="AXIOM">    </p:cNvPr>
-          <p:cNvPicPr>
-            <a:picLocks noChangeAspect="1"/>
-          </p:cNvPicPr>
-          <p:nvPr/>
-        </p:nvPicPr>
-        <p:blipFill>
-          <a:blip r:embed="rId1"/>
-          <a:stretch>
-            <a:fillRect/>
-          </a:stretch>
-        </p:blipFill>
-        <p:spPr>
-          <a:xfrm>
-            <a:off x="9539935" y="310896"/>
-            <a:ext cx="2103120" cy="420624"/>
-          </a:xfrm>
-          <a:prstGeom prst="rect">
-            <a:avLst/>
-          </a:prstGeom>
-        </p:spPr>
-      </p:pic>
-      <p:sp>
-        <p:nvSpPr>
-          <p:cNvPr id="6" name="Situation"/>
-          <p:cNvSpPr txBox="1"/>
-          <p:nvPr/>
-        </p:nvSpPr>
-        <p:spPr>
-          <a:xfrm>
-            <a:off x="548640" y="1645920"/>
-            <a:ext cx="11094415" cy="777240"/>
-          </a:xfrm>
-          <a:prstGeom prst="rect">
-            <a:avLst/>
-          </a:prstGeom>
-          <a:noFill/>
-          <a:ln/>
-        </p:spPr>
-        <p:txBody>
-          <a:bodyPr wrap="square" lIns="0" tIns="0" rIns="0" bIns="0" rtlCol="0" anchor="t"/>
-          <a:lstStyle/>
-          <a:p>
-            <a:pPr indent="0" marL="0">
-              <a:buNone/>
-            </a:pPr>
-            <a:r>
-              <a:rPr lang="en-US" sz="1500" dirty="0">
-                <a:solidFill>
-                  <a:schemeClr val="tx1"/>
-                </a:solidFill>
-              </a:rPr>
-              <a:t>Meridian's board has two executive pledges on its automation program and a standing rule that every proposal arrives as an instance, not a spreadsheet. You support the chief financial officer. Open AXIOM, choose Lab 2.2 and load the Meridian automation program.</a:t>
-            </a:r>
-            <a:endParaRPr lang="en-US" sz="1500" dirty="0"/>
-          </a:p>
-        </p:txBody>
-      </p:sp>
-      <p:sp>
-        <p:nvSpPr>
-          <p:cNvPr id="7" name="Flow line"/>
+      <p:sp>
+        <p:nvSpPr>
+          <p:cNvPr id="5" name="Card"/>
           <p:cNvSpPr/>
           <p:nvPr/>
         </p:nvSpPr>
         <p:spPr>
           <a:xfrm>
-            <a:off x="1658082" y="2880360"/>
-            <a:ext cx="8875532" cy="0"/>
-          </a:xfrm>
-          <a:prstGeom prst="line">
-            <a:avLst/>
-          </a:prstGeom>
-          <a:noFill/>
-          <a:ln w="25400">
-            <a:solidFill>
-              <a:srgbClr val="C4CBD8"/>
-            </a:solidFill>
-            <a:prstDash val="solid"/>
-          </a:ln>
-        </p:spPr>
-      </p:sp>
-      <p:sp>
-        <p:nvSpPr>
-          <p:cNvPr id="8" name="Number"/>
-          <p:cNvSpPr/>
-          <p:nvPr/>
-        </p:nvSpPr>
-        <p:spPr>
-          <a:xfrm>
-            <a:off x="1383762" y="2606040"/>
-            <a:ext cx="548640" cy="548640"/>
-          </a:xfrm>
-          <a:prstGeom prst="ellipse">
-            <a:avLst/>
-          </a:prstGeom>
-          <a:solidFill>
-            <a:schemeClr val="accent1"/>
-          </a:solidFill>
-          <a:ln w="6350">
-            <a:solidFill>
-              <a:schemeClr val="accent1"/>
-            </a:solidFill>
-            <a:prstDash val="solid"/>
-          </a:ln>
-        </p:spPr>
-      </p:sp>
-      <p:sp>
-        <p:nvSpPr>
-          <p:cNvPr id="9" name="Text 5"/>
-          <p:cNvSpPr txBox="1"/>
-          <p:nvPr/>
-        </p:nvSpPr>
-        <p:spPr>
-          <a:xfrm>
-            <a:off x="1383762" y="2606040"/>
-            <a:ext cx="548640" cy="548640"/>
-          </a:xfrm>
-          <a:prstGeom prst="rect">
-            <a:avLst/>
-          </a:prstGeom>
-          <a:noFill/>
-          <a:ln/>
-        </p:spPr>
-        <p:txBody>
-          <a:bodyPr wrap="square" lIns="0" tIns="0" rIns="0" bIns="0" rtlCol="0" anchor="ctr"/>
-          <a:lstStyle/>
-          <a:p>
-            <a:pPr algn="ctr" indent="0" marL="0">
-              <a:buNone/>
-            </a:pPr>
-            <a:r>
-              <a:rPr lang="en-US" sz="1600" b="1" dirty="0">
-                <a:solidFill>
-                  <a:schemeClr val="bg1"/>
-                </a:solidFill>
-                <a:latin typeface="Calibri" pitchFamily="34" charset="0"/>
-                <a:ea typeface="Calibri" pitchFamily="34" charset="-122"/>
-                <a:cs typeface="Calibri" pitchFamily="34" charset="-120"/>
-              </a:rPr>
-              <a:t>1</a:t>
-            </a:r>
-            <a:endParaRPr lang="en-US" sz="1600" dirty="0"/>
-          </a:p>
-        </p:txBody>
-      </p:sp>
-      <p:sp>
-        <p:nvSpPr>
-          <p:cNvPr id="10" name="Flow head"/>
-          <p:cNvSpPr txBox="1"/>
-          <p:nvPr/>
-        </p:nvSpPr>
-        <p:spPr>
-          <a:xfrm>
-            <a:off x="621792" y="3291840"/>
-            <a:ext cx="2072579" cy="548640"/>
-          </a:xfrm>
-          <a:prstGeom prst="rect">
-            <a:avLst/>
-          </a:prstGeom>
-          <a:noFill/>
-          <a:ln/>
-        </p:spPr>
-        <p:txBody>
-          <a:bodyPr wrap="square" lIns="0" tIns="0" rIns="0" bIns="0" rtlCol="0" anchor="t"/>
-          <a:lstStyle/>
-          <a:p>
-            <a:pPr algn="ctr" indent="0" marL="0">
-              <a:buNone/>
-            </a:pPr>
-            <a:r>
-              <a:rPr lang="en-US" sz="1600" b="1" dirty="0">
-                <a:solidFill>
-                  <a:schemeClr val="tx1"/>
-                </a:solidFill>
-                <a:latin typeface="Cambria" pitchFamily="34" charset="0"/>
-                <a:ea typeface="Cambria" pitchFamily="34" charset="-122"/>
-                <a:cs typeface="Cambria" pitchFamily="34" charset="-120"/>
-              </a:rPr>
-              <a:t>Build</a:t>
-            </a:r>
-            <a:endParaRPr lang="en-US" sz="1600" dirty="0"/>
-          </a:p>
-        </p:txBody>
-      </p:sp>
-      <p:sp>
-        <p:nvSpPr>
-          <p:cNvPr id="11" name="Flow text"/>
-          <p:cNvSpPr txBox="1"/>
-          <p:nvPr/>
-        </p:nvSpPr>
-        <p:spPr>
-          <a:xfrm>
-            <a:off x="640080" y="3867912"/>
-            <a:ext cx="2036003" cy="1554480"/>
-          </a:xfrm>
-          <a:prstGeom prst="rect">
-            <a:avLst/>
-          </a:prstGeom>
-          <a:noFill/>
-          <a:ln/>
-        </p:spPr>
-        <p:txBody>
-          <a:bodyPr wrap="square" lIns="0" tIns="0" rIns="0" bIns="0" rtlCol="0" anchor="t"/>
-          <a:lstStyle/>
-          <a:p>
-            <a:pPr algn="ctr" indent="0" marL="0">
-              <a:buNone/>
-            </a:pPr>
-            <a:r>
-              <a:rPr lang="en-US" sz="1400" dirty="0">
-                <a:solidFill>
-                  <a:schemeClr val="tx2"/>
-                </a:solidFill>
-              </a:rPr>
-              <a:t>Declare the five blocks; enter savings as a decision and watch the editor refuse.</a:t>
-            </a:r>
-            <a:endParaRPr lang="en-US" sz="1400" dirty="0"/>
-          </a:p>
-        </p:txBody>
-      </p:sp>
-      <p:sp>
-        <p:nvSpPr>
-          <p:cNvPr id="12" name="Number"/>
-          <p:cNvSpPr/>
-          <p:nvPr/>
-        </p:nvSpPr>
-        <p:spPr>
-          <a:xfrm>
-            <a:off x="3602645" y="2606040"/>
-            <a:ext cx="548640" cy="548640"/>
-          </a:xfrm>
-          <a:prstGeom prst="ellipse">
-            <a:avLst/>
-          </a:prstGeom>
-          <a:solidFill>
-            <a:schemeClr val="accent1"/>
-          </a:solidFill>
-          <a:ln w="6350">
-            <a:solidFill>
-              <a:schemeClr val="accent1"/>
-            </a:solidFill>
-            <a:prstDash val="solid"/>
-          </a:ln>
-        </p:spPr>
-      </p:sp>
-      <p:sp>
-        <p:nvSpPr>
-          <p:cNvPr id="13" name="Text 9"/>
-          <p:cNvSpPr txBox="1"/>
-          <p:nvPr/>
-        </p:nvSpPr>
-        <p:spPr>
-          <a:xfrm>
-            <a:off x="3602645" y="2606040"/>
-            <a:ext cx="548640" cy="548640"/>
-          </a:xfrm>
-          <a:prstGeom prst="rect">
-            <a:avLst/>
-          </a:prstGeom>
-          <a:noFill/>
-          <a:ln/>
-        </p:spPr>
-        <p:txBody>
-          <a:bodyPr wrap="square" lIns="0" tIns="0" rIns="0" bIns="0" rtlCol="0" anchor="ctr"/>
-          <a:lstStyle/>
-          <a:p>
-            <a:pPr algn="ctr" indent="0" marL="0">
-              <a:buNone/>
-            </a:pPr>
-            <a:r>
-              <a:rPr lang="en-US" sz="1600" b="1" dirty="0">
-                <a:solidFill>
-                  <a:schemeClr val="bg1"/>
-                </a:solidFill>
-                <a:latin typeface="Calibri" pitchFamily="34" charset="0"/>
-                <a:ea typeface="Calibri" pitchFamily="34" charset="-122"/>
-                <a:cs typeface="Calibri" pitchFamily="34" charset="-120"/>
-              </a:rPr>
-              <a:t>2</a:t>
-            </a:r>
-            <a:endParaRPr lang="en-US" sz="1600" dirty="0"/>
-          </a:p>
-        </p:txBody>
-      </p:sp>
-      <p:sp>
-        <p:nvSpPr>
-          <p:cNvPr id="14" name="Flow head"/>
-          <p:cNvSpPr txBox="1"/>
-          <p:nvPr/>
-        </p:nvSpPr>
-        <p:spPr>
-          <a:xfrm>
-            <a:off x="2840675" y="3291840"/>
-            <a:ext cx="2072579" cy="548640"/>
-          </a:xfrm>
-          <a:prstGeom prst="rect">
-            <a:avLst/>
-          </a:prstGeom>
-          <a:noFill/>
-          <a:ln/>
-        </p:spPr>
-        <p:txBody>
-          <a:bodyPr wrap="square" lIns="0" tIns="0" rIns="0" bIns="0" rtlCol="0" anchor="t"/>
-          <a:lstStyle/>
-          <a:p>
-            <a:pPr algn="ctr" indent="0" marL="0">
-              <a:buNone/>
-            </a:pPr>
-            <a:r>
-              <a:rPr lang="en-US" sz="1600" b="1" dirty="0">
-                <a:solidFill>
-                  <a:schemeClr val="tx1"/>
-                </a:solidFill>
-                <a:latin typeface="Cambria" pitchFamily="34" charset="0"/>
-                <a:ea typeface="Cambria" pitchFamily="34" charset="-122"/>
-                <a:cs typeface="Cambria" pitchFamily="34" charset="-120"/>
-              </a:rPr>
-              <a:t>Check</a:t>
-            </a:r>
-            <a:endParaRPr lang="en-US" sz="1600" dirty="0"/>
-          </a:p>
-        </p:txBody>
-      </p:sp>
-      <p:sp>
-        <p:nvSpPr>
-          <p:cNvPr id="15" name="Flow text"/>
-          <p:cNvSpPr txBox="1"/>
-          <p:nvPr/>
-        </p:nvSpPr>
-        <p:spPr>
-          <a:xfrm>
-            <a:off x="2858963" y="3867912"/>
-            <a:ext cx="2036003" cy="1554480"/>
-          </a:xfrm>
-          <a:prstGeom prst="rect">
-            <a:avLst/>
-          </a:prstGeom>
-          <a:noFill/>
-          <a:ln/>
-        </p:spPr>
-        <p:txBody>
-          <a:bodyPr wrap="square" lIns="0" tIns="0" rIns="0" bIns="0" rtlCol="0" anchor="t"/>
-          <a:lstStyle/>
-          <a:p>
-            <a:pPr algn="ctr" indent="0" marL="0">
-              <a:buNone/>
-            </a:pPr>
-            <a:r>
-              <a:rPr lang="en-US" sz="1400" dirty="0">
-                <a:solidFill>
-                  <a:schemeClr val="tx2"/>
-                </a:solidFill>
-              </a:rPr>
-              <a:t>Run the joint plan forward and find the year it dies; compare the COO's plan with all savings kept.</a:t>
-            </a:r>
-            <a:endParaRPr lang="en-US" sz="1400" dirty="0"/>
-          </a:p>
-        </p:txBody>
-      </p:sp>
-      <p:sp>
-        <p:nvSpPr>
-          <p:cNvPr id="16" name="Number"/>
-          <p:cNvSpPr/>
-          <p:nvPr/>
-        </p:nvSpPr>
-        <p:spPr>
-          <a:xfrm>
-            <a:off x="5821528" y="2606040"/>
-            <a:ext cx="548640" cy="548640"/>
-          </a:xfrm>
-          <a:prstGeom prst="ellipse">
-            <a:avLst/>
-          </a:prstGeom>
-          <a:solidFill>
-            <a:schemeClr val="accent1"/>
-          </a:solidFill>
-          <a:ln w="6350">
-            <a:solidFill>
-              <a:schemeClr val="accent1"/>
-            </a:solidFill>
-            <a:prstDash val="solid"/>
-          </a:ln>
-        </p:spPr>
-      </p:sp>
-      <p:sp>
-        <p:nvSpPr>
-          <p:cNvPr id="17" name="Text 13"/>
-          <p:cNvSpPr txBox="1"/>
-          <p:nvPr/>
-        </p:nvSpPr>
-        <p:spPr>
-          <a:xfrm>
-            <a:off x="5821528" y="2606040"/>
-            <a:ext cx="548640" cy="548640"/>
-          </a:xfrm>
-          <a:prstGeom prst="rect">
-            <a:avLst/>
-          </a:prstGeom>
-          <a:noFill/>
-          <a:ln/>
-        </p:spPr>
-        <p:txBody>
-          <a:bodyPr wrap="square" lIns="0" tIns="0" rIns="0" bIns="0" rtlCol="0" anchor="ctr"/>
-          <a:lstStyle/>
-          <a:p>
-            <a:pPr algn="ctr" indent="0" marL="0">
-              <a:buNone/>
-            </a:pPr>
-            <a:r>
-              <a:rPr lang="en-US" sz="1600" b="1" dirty="0">
-                <a:solidFill>
-                  <a:schemeClr val="bg1"/>
-                </a:solidFill>
-                <a:latin typeface="Calibri" pitchFamily="34" charset="0"/>
-                <a:ea typeface="Calibri" pitchFamily="34" charset="-122"/>
-                <a:cs typeface="Calibri" pitchFamily="34" charset="-120"/>
-              </a:rPr>
-              <a:t>3</a:t>
-            </a:r>
-            <a:endParaRPr lang="en-US" sz="1600" dirty="0"/>
-          </a:p>
-        </p:txBody>
-      </p:sp>
-      <p:sp>
-        <p:nvSpPr>
-          <p:cNvPr id="18" name="Flow head"/>
-          <p:cNvSpPr txBox="1"/>
-          <p:nvPr/>
-        </p:nvSpPr>
-        <p:spPr>
-          <a:xfrm>
-            <a:off x="5059558" y="3291840"/>
-            <a:ext cx="2072579" cy="548640"/>
-          </a:xfrm>
-          <a:prstGeom prst="rect">
-            <a:avLst/>
-          </a:prstGeom>
-          <a:noFill/>
-          <a:ln/>
-        </p:spPr>
-        <p:txBody>
-          <a:bodyPr wrap="square" lIns="0" tIns="0" rIns="0" bIns="0" rtlCol="0" anchor="t"/>
-          <a:lstStyle/>
-          <a:p>
-            <a:pPr algn="ctr" indent="0" marL="0">
-              <a:buNone/>
-            </a:pPr>
-            <a:r>
-              <a:rPr lang="en-US" sz="1600" b="1" dirty="0">
-                <a:solidFill>
-                  <a:schemeClr val="tx1"/>
-                </a:solidFill>
-                <a:latin typeface="Cambria" pitchFamily="34" charset="0"/>
-                <a:ea typeface="Cambria" pitchFamily="34" charset="-122"/>
-                <a:cs typeface="Cambria" pitchFamily="34" charset="-120"/>
-              </a:rPr>
-              <a:t>Diagnose</a:t>
-            </a:r>
-            <a:endParaRPr lang="en-US" sz="1600" dirty="0"/>
-          </a:p>
-        </p:txBody>
-      </p:sp>
-      <p:sp>
-        <p:nvSpPr>
-          <p:cNvPr id="19" name="Flow text"/>
-          <p:cNvSpPr txBox="1"/>
-          <p:nvPr/>
-        </p:nvSpPr>
-        <p:spPr>
-          <a:xfrm>
-            <a:off x="5077846" y="3867912"/>
-            <a:ext cx="2036003" cy="1554480"/>
-          </a:xfrm>
-          <a:prstGeom prst="rect">
-            <a:avLst/>
-          </a:prstGeom>
-          <a:noFill/>
-          <a:ln/>
-        </p:spPr>
-        <p:txBody>
-          <a:bodyPr wrap="square" lIns="0" tIns="0" rIns="0" bIns="0" rtlCol="0" anchor="t"/>
-          <a:lstStyle/>
-          <a:p>
-            <a:pPr algn="ctr" indent="0" marL="0">
-              <a:buNone/>
-            </a:pPr>
-            <a:r>
-              <a:rPr lang="en-US" sz="1400" dirty="0">
-                <a:solidFill>
-                  <a:schemeClr val="tx2"/>
-                </a:solidFill>
-              </a:rPr>
-              <a:t>Run the deletion filter twice and record both clashes; drop the floor alone.</a:t>
-            </a:r>
-            <a:endParaRPr lang="en-US" sz="1400" dirty="0"/>
-          </a:p>
-        </p:txBody>
-      </p:sp>
-      <p:sp>
-        <p:nvSpPr>
-          <p:cNvPr id="20" name="Number"/>
-          <p:cNvSpPr/>
-          <p:nvPr/>
-        </p:nvSpPr>
-        <p:spPr>
-          <a:xfrm>
-            <a:off x="8040411" y="2606040"/>
-            <a:ext cx="548640" cy="548640"/>
-          </a:xfrm>
-          <a:prstGeom prst="ellipse">
-            <a:avLst/>
-          </a:prstGeom>
-          <a:solidFill>
-            <a:schemeClr val="accent1"/>
-          </a:solidFill>
-          <a:ln w="6350">
-            <a:solidFill>
-              <a:schemeClr val="accent1"/>
-            </a:solidFill>
-            <a:prstDash val="solid"/>
-          </a:ln>
-        </p:spPr>
-      </p:sp>
-      <p:sp>
-        <p:nvSpPr>
-          <p:cNvPr id="21" name="Text 17"/>
-          <p:cNvSpPr txBox="1"/>
-          <p:nvPr/>
-        </p:nvSpPr>
-        <p:spPr>
-          <a:xfrm>
-            <a:off x="8040411" y="2606040"/>
-            <a:ext cx="548640" cy="548640"/>
-          </a:xfrm>
-          <a:prstGeom prst="rect">
-            <a:avLst/>
-          </a:prstGeom>
-          <a:noFill/>
-          <a:ln/>
-        </p:spPr>
-        <p:txBody>
-          <a:bodyPr wrap="square" lIns="0" tIns="0" rIns="0" bIns="0" rtlCol="0" anchor="ctr"/>
-          <a:lstStyle/>
-          <a:p>
-            <a:pPr algn="ctr" indent="0" marL="0">
-              <a:buNone/>
-            </a:pPr>
-            <a:r>
-              <a:rPr lang="en-US" sz="1600" b="1" dirty="0">
-                <a:solidFill>
-                  <a:schemeClr val="bg1"/>
-                </a:solidFill>
-                <a:latin typeface="Calibri" pitchFamily="34" charset="0"/>
-                <a:ea typeface="Calibri" pitchFamily="34" charset="-122"/>
-                <a:cs typeface="Calibri" pitchFamily="34" charset="-120"/>
-              </a:rPr>
-              <a:t>4</a:t>
-            </a:r>
-            <a:endParaRPr lang="en-US" sz="1600" dirty="0"/>
-          </a:p>
-        </p:txBody>
-      </p:sp>
-      <p:sp>
-        <p:nvSpPr>
-          <p:cNvPr id="22" name="Flow head"/>
-          <p:cNvSpPr txBox="1"/>
-          <p:nvPr/>
-        </p:nvSpPr>
-        <p:spPr>
-          <a:xfrm>
-            <a:off x="7278441" y="3291840"/>
-            <a:ext cx="2072579" cy="548640"/>
-          </a:xfrm>
-          <a:prstGeom prst="rect">
-            <a:avLst/>
-          </a:prstGeom>
-          <a:noFill/>
-          <a:ln/>
-        </p:spPr>
-        <p:txBody>
-          <a:bodyPr wrap="square" lIns="0" tIns="0" rIns="0" bIns="0" rtlCol="0" anchor="t"/>
-          <a:lstStyle/>
-          <a:p>
-            <a:pPr algn="ctr" indent="0" marL="0">
-              <a:buNone/>
-            </a:pPr>
-            <a:r>
-              <a:rPr lang="en-US" sz="1600" b="1" dirty="0">
-                <a:solidFill>
-                  <a:schemeClr val="tx1"/>
-                </a:solidFill>
-                <a:latin typeface="Cambria" pitchFamily="34" charset="0"/>
-                <a:ea typeface="Cambria" pitchFamily="34" charset="-122"/>
-                <a:cs typeface="Cambria" pitchFamily="34" charset="-120"/>
-              </a:rPr>
-              <a:t>Price</a:t>
-            </a:r>
-            <a:endParaRPr lang="en-US" sz="1600" dirty="0"/>
-          </a:p>
-        </p:txBody>
-      </p:sp>
-      <p:sp>
-        <p:nvSpPr>
-          <p:cNvPr id="23" name="Flow text"/>
-          <p:cNvSpPr txBox="1"/>
-          <p:nvPr/>
-        </p:nvSpPr>
-        <p:spPr>
-          <a:xfrm>
-            <a:off x="7296729" y="3867912"/>
-            <a:ext cx="2036003" cy="1554480"/>
-          </a:xfrm>
-          <a:prstGeom prst="rect">
-            <a:avLst/>
-          </a:prstGeom>
-          <a:noFill/>
-          <a:ln/>
-        </p:spPr>
-        <p:txBody>
-          <a:bodyPr wrap="square" lIns="0" tIns="0" rIns="0" bIns="0" rtlCol="0" anchor="t"/>
-          <a:lstStyle/>
-          <a:p>
-            <a:pPr algn="ctr" indent="0" marL="0">
-              <a:buNone/>
-            </a:pPr>
-            <a:r>
-              <a:rPr lang="en-US" sz="1400" dirty="0">
-                <a:solidFill>
-                  <a:schemeClr val="tx2"/>
-                </a:solidFill>
-              </a:rPr>
-              <a:t>Find the largest payout share or the most rounds each repair allows; rebuild Table 2.7.</a:t>
-            </a:r>
-            <a:endParaRPr lang="en-US" sz="1400" dirty="0"/>
-          </a:p>
-        </p:txBody>
-      </p:sp>
-      <p:sp>
-        <p:nvSpPr>
-          <p:cNvPr id="24" name="Number"/>
-          <p:cNvSpPr/>
-          <p:nvPr/>
-        </p:nvSpPr>
-        <p:spPr>
-          <a:xfrm>
-            <a:off x="10259294" y="2606040"/>
-            <a:ext cx="548640" cy="548640"/>
-          </a:xfrm>
-          <a:prstGeom prst="ellipse">
-            <a:avLst/>
-          </a:prstGeom>
-          <a:solidFill>
-            <a:schemeClr val="accent1"/>
-          </a:solidFill>
-          <a:ln w="6350">
-            <a:solidFill>
-              <a:schemeClr val="accent1"/>
-            </a:solidFill>
-            <a:prstDash val="solid"/>
-          </a:ln>
-        </p:spPr>
-      </p:sp>
-      <p:sp>
-        <p:nvSpPr>
-          <p:cNvPr id="25" name="Text 21"/>
-          <p:cNvSpPr txBox="1"/>
-          <p:nvPr/>
-        </p:nvSpPr>
-        <p:spPr>
-          <a:xfrm>
-            <a:off x="10259294" y="2606040"/>
-            <a:ext cx="548640" cy="548640"/>
-          </a:xfrm>
-          <a:prstGeom prst="rect">
-            <a:avLst/>
-          </a:prstGeom>
-          <a:noFill/>
-          <a:ln/>
-        </p:spPr>
-        <p:txBody>
-          <a:bodyPr wrap="square" lIns="0" tIns="0" rIns="0" bIns="0" rtlCol="0" anchor="ctr"/>
-          <a:lstStyle/>
-          <a:p>
-            <a:pPr algn="ctr" indent="0" marL="0">
-              <a:buNone/>
-            </a:pPr>
-            <a:r>
-              <a:rPr lang="en-US" sz="1600" b="1" dirty="0">
-                <a:solidFill>
-                  <a:schemeClr val="bg1"/>
-                </a:solidFill>
-                <a:latin typeface="Calibri" pitchFamily="34" charset="0"/>
-                <a:ea typeface="Calibri" pitchFamily="34" charset="-122"/>
-                <a:cs typeface="Calibri" pitchFamily="34" charset="-120"/>
-              </a:rPr>
-              <a:t>5</a:t>
-            </a:r>
-            <a:endParaRPr lang="en-US" sz="1600" dirty="0"/>
-          </a:p>
-        </p:txBody>
-      </p:sp>
-      <p:sp>
-        <p:nvSpPr>
-          <p:cNvPr id="26" name="Flow head"/>
-          <p:cNvSpPr txBox="1"/>
-          <p:nvPr/>
-        </p:nvSpPr>
-        <p:spPr>
-          <a:xfrm>
-            <a:off x="9497324" y="3291840"/>
-            <a:ext cx="2072579" cy="548640"/>
-          </a:xfrm>
-          <a:prstGeom prst="rect">
-            <a:avLst/>
-          </a:prstGeom>
-          <a:noFill/>
-          <a:ln/>
-        </p:spPr>
-        <p:txBody>
-          <a:bodyPr wrap="square" lIns="0" tIns="0" rIns="0" bIns="0" rtlCol="0" anchor="t"/>
-          <a:lstStyle/>
-          <a:p>
-            <a:pPr algn="ctr" indent="0" marL="0">
-              <a:buNone/>
-            </a:pPr>
-            <a:r>
-              <a:rPr lang="en-US" sz="1600" b="1" dirty="0">
-                <a:solidFill>
-                  <a:schemeClr val="tx1"/>
-                </a:solidFill>
-                <a:latin typeface="Cambria" pitchFamily="34" charset="0"/>
-                <a:ea typeface="Cambria" pitchFamily="34" charset="-122"/>
-                <a:cs typeface="Cambria" pitchFamily="34" charset="-120"/>
-              </a:rPr>
-              <a:t>Reweight</a:t>
-            </a:r>
-            <a:endParaRPr lang="en-US" sz="1600" dirty="0"/>
-          </a:p>
-        </p:txBody>
-      </p:sp>
-      <p:sp>
-        <p:nvSpPr>
-          <p:cNvPr id="27" name="Flow text"/>
-          <p:cNvSpPr txBox="1"/>
-          <p:nvPr/>
-        </p:nvSpPr>
-        <p:spPr>
-          <a:xfrm>
-            <a:off x="9515612" y="3867912"/>
-            <a:ext cx="2036003" cy="1554480"/>
-          </a:xfrm>
-          <a:prstGeom prst="rect">
-            <a:avLst/>
-          </a:prstGeom>
-          <a:noFill/>
-          <a:ln/>
-        </p:spPr>
-        <p:txBody>
-          <a:bodyPr wrap="square" lIns="0" tIns="0" rIns="0" bIns="0" rtlCol="0" anchor="t"/>
-          <a:lstStyle/>
-          <a:p>
-            <a:pPr algn="ctr" indent="0" marL="0">
-              <a:buNone/>
-            </a:pPr>
-            <a:r>
-              <a:rPr lang="en-US" sz="1400" dirty="0">
-                <a:solidFill>
-                  <a:schemeClr val="tx2"/>
-                </a:solidFill>
-              </a:rPr>
-              <a:t>Move the terminal credit from 0 to 60 years; switch to Mayer form; export in standard form.</a:t>
-            </a:r>
-            <a:endParaRPr lang="en-US" sz="1400" dirty="0"/>
-          </a:p>
-        </p:txBody>
-      </p:sp>
-      <p:sp>
-        <p:nvSpPr>
-          <p:cNvPr id="28" name="Deliverable card"/>
-          <p:cNvSpPr/>
-          <p:nvPr/>
-        </p:nvSpPr>
-        <p:spPr>
-          <a:xfrm>
-            <a:off x="548640" y="5486400"/>
-            <a:ext cx="11094415" cy="685800"/>
+            <a:off x="548640" y="1691640"/>
+            <a:ext cx="3515258" cy="2103120"/>
           </a:xfrm>
           <a:prstGeom prst="roundRect">
             <a:avLst>
-              <a:gd name="adj" fmla="val 10667"/>
+              <a:gd name="adj" fmla="val 3478"/>
             </a:avLst>
           </a:prstGeom>
           <a:solidFill>
@@ -17964,14 +17280,14 @@
       </p:sp>
       <p:sp>
         <p:nvSpPr>
-          <p:cNvPr id="29" name="Deliverable"/>
+          <p:cNvPr id="6" name="Card label"/>
           <p:cNvSpPr txBox="1"/>
           <p:nvPr/>
         </p:nvSpPr>
         <p:spPr>
           <a:xfrm>
-            <a:off x="777240" y="5559552"/>
-            <a:ext cx="10637215" cy="539496"/>
+            <a:off x="731520" y="1819656"/>
+            <a:ext cx="3149498" cy="310896"/>
           </a:xfrm>
           <a:prstGeom prst="rect">
             <a:avLst/>
@@ -17987,22 +17303,779 @@
               <a:buNone/>
             </a:pPr>
             <a:r>
-              <a:rPr lang="en-US" sz="1400" b="1" dirty="0">
+              <a:rPr lang="en-US" sz="1300" b="1" dirty="0">
+                <a:solidFill>
+                  <a:schemeClr val="accent1"/>
+                </a:solidFill>
+              </a:rPr>
+              <a:t>The decision</a:t>
+            </a:r>
+            <a:endParaRPr lang="en-US" sz="1300" dirty="0"/>
+          </a:p>
+        </p:txBody>
+      </p:sp>
+      <p:sp>
+        <p:nvSpPr>
+          <p:cNvPr id="7" name="Card head"/>
+          <p:cNvSpPr txBox="1"/>
+          <p:nvPr/>
+        </p:nvSpPr>
+        <p:spPr>
+          <a:xfrm>
+            <a:off x="731520" y="2148840"/>
+            <a:ext cx="3149498" cy="576072"/>
+          </a:xfrm>
+          <a:prstGeom prst="rect">
+            <a:avLst/>
+          </a:prstGeom>
+          <a:noFill/>
+          <a:ln/>
+        </p:spPr>
+        <p:txBody>
+          <a:bodyPr wrap="square" lIns="0" tIns="0" rIns="0" bIns="0" rtlCol="0" anchor="t"/>
+          <a:lstStyle/>
+          <a:p>
+            <a:pPr indent="0" marL="0">
+              <a:buNone/>
+            </a:pPr>
+            <a:r>
+              <a:rPr lang="en-US" sz="1600" b="1" dirty="0">
                 <a:solidFill>
                   <a:schemeClr val="tx1"/>
                 </a:solidFill>
-              </a:rPr>
-              <a:t>Deliverable:</a:t>
-            </a:r>
-            <a:r>
-              <a:rPr lang="en-US" sz="1400" dirty="0">
+                <a:latin typeface="Cambria" pitchFamily="34" charset="0"/>
+                <a:ea typeface="Cambria" pitchFamily="34" charset="-122"/>
+                <a:cs typeface="Cambria" pitchFamily="34" charset="-120"/>
+              </a:rPr>
+              <a:t>Make, pack, hold, and ship</a:t>
+            </a:r>
+            <a:endParaRPr lang="en-US" sz="1600" dirty="0"/>
+          </a:p>
+        </p:txBody>
+      </p:sp>
+      <p:sp>
+        <p:nvSpPr>
+          <p:cNvPr id="8" name="Card text"/>
+          <p:cNvSpPr txBox="1"/>
+          <p:nvPr/>
+        </p:nvSpPr>
+        <p:spPr>
+          <a:xfrm>
+            <a:off x="731520" y="2798064"/>
+            <a:ext cx="3149498" cy="868680"/>
+          </a:xfrm>
+          <a:prstGeom prst="rect">
+            <a:avLst/>
+          </a:prstGeom>
+          <a:noFill/>
+          <a:ln/>
+        </p:spPr>
+        <p:txBody>
+          <a:bodyPr wrap="square" lIns="0" tIns="0" rIns="0" bIns="0" rtlCol="0" anchor="t"/>
+          <a:lstStyle/>
+          <a:p>
+            <a:pPr indent="0" marL="0">
+              <a:buNone/>
+            </a:pPr>
+            <a:r>
+              <a:rPr lang="en-US" sz="1300" dirty="0">
+                <a:solidFill>
+                  <a:schemeClr val="tx2"/>
+                </a:solidFill>
+              </a:rPr>
+              <a:t>Weekly, for 600-plus cereal stock-keeping units across plants and distribution centers; monthly, budgets and capacity.</a:t>
+            </a:r>
+            <a:endParaRPr lang="en-US" sz="1300" dirty="0"/>
+          </a:p>
+        </p:txBody>
+      </p:sp>
+      <p:sp>
+        <p:nvSpPr>
+          <p:cNvPr id="9" name="Card"/>
+          <p:cNvSpPr/>
+          <p:nvPr/>
+        </p:nvSpPr>
+        <p:spPr>
+          <a:xfrm>
+            <a:off x="4338218" y="1691640"/>
+            <a:ext cx="3515258" cy="2103120"/>
+          </a:xfrm>
+          <a:prstGeom prst="roundRect">
+            <a:avLst>
+              <a:gd name="adj" fmla="val 3478"/>
+            </a:avLst>
+          </a:prstGeom>
+          <a:solidFill>
+            <a:schemeClr val="bg2"/>
+          </a:solidFill>
+          <a:ln w="9525">
+            <a:solidFill>
+              <a:srgbClr val="C4CBD8"/>
+            </a:solidFill>
+            <a:prstDash val="solid"/>
+          </a:ln>
+        </p:spPr>
+      </p:sp>
+      <p:sp>
+        <p:nvSpPr>
+          <p:cNvPr id="10" name="Card label"/>
+          <p:cNvSpPr txBox="1"/>
+          <p:nvPr/>
+        </p:nvSpPr>
+        <p:spPr>
+          <a:xfrm>
+            <a:off x="4521098" y="1819656"/>
+            <a:ext cx="3149498" cy="310896"/>
+          </a:xfrm>
+          <a:prstGeom prst="rect">
+            <a:avLst/>
+          </a:prstGeom>
+          <a:noFill/>
+          <a:ln/>
+        </p:spPr>
+        <p:txBody>
+          <a:bodyPr wrap="square" lIns="0" tIns="0" rIns="0" bIns="0" rtlCol="0" anchor="ctr"/>
+          <a:lstStyle/>
+          <a:p>
+            <a:pPr indent="0" marL="0">
+              <a:buNone/>
+            </a:pPr>
+            <a:r>
+              <a:rPr lang="en-US" sz="1300" b="1" dirty="0">
+                <a:solidFill>
+                  <a:schemeClr val="accent1"/>
+                </a:solidFill>
+              </a:rPr>
+              <a:t>The method</a:t>
+            </a:r>
+            <a:endParaRPr lang="en-US" sz="1300" dirty="0"/>
+          </a:p>
+        </p:txBody>
+      </p:sp>
+      <p:sp>
+        <p:nvSpPr>
+          <p:cNvPr id="11" name="Card head"/>
+          <p:cNvSpPr txBox="1"/>
+          <p:nvPr/>
+        </p:nvSpPr>
+        <p:spPr>
+          <a:xfrm>
+            <a:off x="4521098" y="2148840"/>
+            <a:ext cx="3149498" cy="576072"/>
+          </a:xfrm>
+          <a:prstGeom prst="rect">
+            <a:avLst/>
+          </a:prstGeom>
+          <a:noFill/>
+          <a:ln/>
+        </p:spPr>
+        <p:txBody>
+          <a:bodyPr wrap="square" lIns="0" tIns="0" rIns="0" bIns="0" rtlCol="0" anchor="t"/>
+          <a:lstStyle/>
+          <a:p>
+            <a:pPr indent="0" marL="0">
+              <a:buNone/>
+            </a:pPr>
+            <a:r>
+              <a:rPr lang="en-US" sz="1600" b="1" dirty="0">
                 <a:solidFill>
                   <a:schemeClr val="tx1"/>
                 </a:solidFill>
-              </a:rPr>
-              <a:t> a one-page note to the board: the instance card, the year the joint plan dies, the two clashes, the three repairs with their prices, and a recommendation on the terminal credit, with its owner. About 75 minutes.</a:t>
-            </a:r>
-            <a:endParaRPr lang="en-US" sz="1400" dirty="0"/>
+                <a:latin typeface="Cambria" pitchFamily="34" charset="0"/>
+                <a:ea typeface="Cambria" pitchFamily="34" charset="-122"/>
+                <a:cs typeface="Cambria" pitchFamily="34" charset="-120"/>
+              </a:rPr>
+              <a:t>A large linear program</a:t>
+            </a:r>
+            <a:endParaRPr lang="en-US" sz="1600" dirty="0"/>
+          </a:p>
+        </p:txBody>
+      </p:sp>
+      <p:sp>
+        <p:nvSpPr>
+          <p:cNvPr id="12" name="Card text"/>
+          <p:cNvSpPr txBox="1"/>
+          <p:nvPr/>
+        </p:nvSpPr>
+        <p:spPr>
+          <a:xfrm>
+            <a:off x="4521098" y="2798064"/>
+            <a:ext cx="3149498" cy="868680"/>
+          </a:xfrm>
+          <a:prstGeom prst="rect">
+            <a:avLst/>
+          </a:prstGeom>
+          <a:noFill/>
+          <a:ln/>
+        </p:spPr>
+        <p:txBody>
+          <a:bodyPr wrap="square" lIns="0" tIns="0" rIns="0" bIns="0" rtlCol="0" anchor="t"/>
+          <a:lstStyle/>
+          <a:p>
+            <a:pPr indent="0" marL="0">
+              <a:buNone/>
+            </a:pPr>
+            <a:r>
+              <a:rPr lang="en-US" sz="1300" dirty="0">
+                <a:solidFill>
+                  <a:schemeClr val="tx2"/>
+                </a:solidFill>
+              </a:rPr>
+              <a:t>About 100,000 constraints and 700,000 variables; most commitments are elastic goals, broken at a price.</a:t>
+            </a:r>
+            <a:endParaRPr lang="en-US" sz="1300" dirty="0"/>
+          </a:p>
+        </p:txBody>
+      </p:sp>
+      <p:sp>
+        <p:nvSpPr>
+          <p:cNvPr id="13" name="Card"/>
+          <p:cNvSpPr/>
+          <p:nvPr/>
+        </p:nvSpPr>
+        <p:spPr>
+          <a:xfrm>
+            <a:off x="8127797" y="1691640"/>
+            <a:ext cx="3515258" cy="2103120"/>
+          </a:xfrm>
+          <a:prstGeom prst="roundRect">
+            <a:avLst>
+              <a:gd name="adj" fmla="val 3478"/>
+            </a:avLst>
+          </a:prstGeom>
+          <a:solidFill>
+            <a:schemeClr val="tx1"/>
+          </a:solidFill>
+          <a:ln w="9525">
+            <a:solidFill>
+              <a:srgbClr val="0F1E3D"/>
+            </a:solidFill>
+            <a:prstDash val="solid"/>
+          </a:ln>
+        </p:spPr>
+      </p:sp>
+      <p:sp>
+        <p:nvSpPr>
+          <p:cNvPr id="14" name="Card label"/>
+          <p:cNvSpPr txBox="1"/>
+          <p:nvPr/>
+        </p:nvSpPr>
+        <p:spPr>
+          <a:xfrm>
+            <a:off x="8310677" y="1819656"/>
+            <a:ext cx="3149498" cy="310896"/>
+          </a:xfrm>
+          <a:prstGeom prst="rect">
+            <a:avLst/>
+          </a:prstGeom>
+          <a:noFill/>
+          <a:ln/>
+        </p:spPr>
+        <p:txBody>
+          <a:bodyPr wrap="square" lIns="0" tIns="0" rIns="0" bIns="0" rtlCol="0" anchor="ctr"/>
+          <a:lstStyle/>
+          <a:p>
+            <a:pPr indent="0" marL="0">
+              <a:buNone/>
+            </a:pPr>
+            <a:r>
+              <a:rPr lang="en-US" sz="1300" b="1" dirty="0">
+                <a:solidFill>
+                  <a:schemeClr val="accent1"/>
+                </a:solidFill>
+              </a:rPr>
+              <a:t>The result</a:t>
+            </a:r>
+            <a:endParaRPr lang="en-US" sz="1300" dirty="0"/>
+          </a:p>
+        </p:txBody>
+      </p:sp>
+      <p:sp>
+        <p:nvSpPr>
+          <p:cNvPr id="15" name="Card head"/>
+          <p:cNvSpPr txBox="1"/>
+          <p:nvPr/>
+        </p:nvSpPr>
+        <p:spPr>
+          <a:xfrm>
+            <a:off x="8310677" y="2148840"/>
+            <a:ext cx="3149498" cy="576072"/>
+          </a:xfrm>
+          <a:prstGeom prst="rect">
+            <a:avLst/>
+          </a:prstGeom>
+          <a:noFill/>
+          <a:ln/>
+        </p:spPr>
+        <p:txBody>
+          <a:bodyPr wrap="square" lIns="0" tIns="0" rIns="0" bIns="0" rtlCol="0" anchor="t"/>
+          <a:lstStyle/>
+          <a:p>
+            <a:pPr indent="0" marL="0">
+              <a:buNone/>
+            </a:pPr>
+            <a:r>
+              <a:rPr lang="en-US" sz="1600" b="1" dirty="0">
+                <a:solidFill>
+                  <a:schemeClr val="bg1"/>
+                </a:solidFill>
+                <a:latin typeface="Cambria" pitchFamily="34" charset="0"/>
+                <a:ea typeface="Cambria" pitchFamily="34" charset="-122"/>
+                <a:cs typeface="Cambria" pitchFamily="34" charset="-120"/>
+              </a:rPr>
+              <a:t>$4.5m saved in 1995</a:t>
+            </a:r>
+            <a:endParaRPr lang="en-US" sz="1600" dirty="0"/>
+          </a:p>
+        </p:txBody>
+      </p:sp>
+      <p:sp>
+        <p:nvSpPr>
+          <p:cNvPr id="16" name="Card text"/>
+          <p:cNvSpPr txBox="1"/>
+          <p:nvPr/>
+        </p:nvSpPr>
+        <p:spPr>
+          <a:xfrm>
+            <a:off x="8310677" y="2798064"/>
+            <a:ext cx="3149498" cy="868680"/>
+          </a:xfrm>
+          <a:prstGeom prst="rect">
+            <a:avLst/>
+          </a:prstGeom>
+          <a:noFill/>
+          <a:ln/>
+        </p:spPr>
+        <p:txBody>
+          <a:bodyPr wrap="square" lIns="0" tIns="0" rIns="0" bIns="0" rtlCol="0" anchor="t"/>
+          <a:lstStyle/>
+          <a:p>
+            <a:pPr indent="0" marL="0">
+              <a:buNone/>
+            </a:pPr>
+            <a:r>
+              <a:rPr lang="en-US" sz="1300" dirty="0">
+                <a:solidFill>
+                  <a:schemeClr val="bg2"/>
+                </a:solidFill>
+              </a:rPr>
+              <a:t>And a capacity consolidation guided by the model, with projected savings of $35–40m a year.</a:t>
+            </a:r>
+            <a:endParaRPr lang="en-US" sz="1300" dirty="0"/>
+          </a:p>
+        </p:txBody>
+      </p:sp>
+      <p:sp>
+        <p:nvSpPr>
+          <p:cNvPr id="17" name="Card"/>
+          <p:cNvSpPr/>
+          <p:nvPr/>
+        </p:nvSpPr>
+        <p:spPr>
+          <a:xfrm>
+            <a:off x="548640" y="4069080"/>
+            <a:ext cx="3515258" cy="2103120"/>
+          </a:xfrm>
+          <a:prstGeom prst="roundRect">
+            <a:avLst>
+              <a:gd name="adj" fmla="val 3478"/>
+            </a:avLst>
+          </a:prstGeom>
+          <a:solidFill>
+            <a:schemeClr val="bg2"/>
+          </a:solidFill>
+          <a:ln w="9525">
+            <a:solidFill>
+              <a:srgbClr val="C4CBD8"/>
+            </a:solidFill>
+            <a:prstDash val="solid"/>
+          </a:ln>
+        </p:spPr>
+      </p:sp>
+      <p:sp>
+        <p:nvSpPr>
+          <p:cNvPr id="18" name="Card label"/>
+          <p:cNvSpPr txBox="1"/>
+          <p:nvPr/>
+        </p:nvSpPr>
+        <p:spPr>
+          <a:xfrm>
+            <a:off x="731520" y="4197096"/>
+            <a:ext cx="3149498" cy="310896"/>
+          </a:xfrm>
+          <a:prstGeom prst="rect">
+            <a:avLst/>
+          </a:prstGeom>
+          <a:noFill/>
+          <a:ln/>
+        </p:spPr>
+        <p:txBody>
+          <a:bodyPr wrap="square" lIns="0" tIns="0" rIns="0" bIns="0" rtlCol="0" anchor="ctr"/>
+          <a:lstStyle/>
+          <a:p>
+            <a:pPr indent="0" marL="0">
+              <a:buNone/>
+            </a:pPr>
+            <a:r>
+              <a:rPr lang="en-US" sz="1300" b="1" dirty="0">
+                <a:solidFill>
+                  <a:schemeClr val="accent1"/>
+                </a:solidFill>
+              </a:rPr>
+              <a:t>Making it work</a:t>
+            </a:r>
+            <a:endParaRPr lang="en-US" sz="1300" dirty="0"/>
+          </a:p>
+        </p:txBody>
+      </p:sp>
+      <p:sp>
+        <p:nvSpPr>
+          <p:cNvPr id="19" name="Card head"/>
+          <p:cNvSpPr txBox="1"/>
+          <p:nvPr/>
+        </p:nvSpPr>
+        <p:spPr>
+          <a:xfrm>
+            <a:off x="731520" y="4526280"/>
+            <a:ext cx="3149498" cy="576072"/>
+          </a:xfrm>
+          <a:prstGeom prst="rect">
+            <a:avLst/>
+          </a:prstGeom>
+          <a:noFill/>
+          <a:ln/>
+        </p:spPr>
+        <p:txBody>
+          <a:bodyPr wrap="square" lIns="0" tIns="0" rIns="0" bIns="0" rtlCol="0" anchor="t"/>
+          <a:lstStyle/>
+          <a:p>
+            <a:pPr indent="0" marL="0">
+              <a:buNone/>
+            </a:pPr>
+            <a:r>
+              <a:rPr lang="en-US" sz="1600" b="1" dirty="0">
+                <a:solidFill>
+                  <a:schemeClr val="tx1"/>
+                </a:solidFill>
+                <a:latin typeface="Cambria" pitchFamily="34" charset="0"/>
+                <a:ea typeface="Cambria" pitchFamily="34" charset="-122"/>
+                <a:cs typeface="Cambria" pitchFamily="34" charset="-120"/>
+              </a:rPr>
+              <a:t>Costs entered in stages</a:t>
+            </a:r>
+            <a:endParaRPr lang="en-US" sz="1600" dirty="0"/>
+          </a:p>
+        </p:txBody>
+      </p:sp>
+      <p:sp>
+        <p:nvSpPr>
+          <p:cNvPr id="20" name="Card text"/>
+          <p:cNvSpPr txBox="1"/>
+          <p:nvPr/>
+        </p:nvSpPr>
+        <p:spPr>
+          <a:xfrm>
+            <a:off x="731520" y="5175504"/>
+            <a:ext cx="3149498" cy="868680"/>
+          </a:xfrm>
+          <a:prstGeom prst="rect">
+            <a:avLst/>
+          </a:prstGeom>
+          <a:noFill/>
+          <a:ln/>
+        </p:spPr>
+        <p:txBody>
+          <a:bodyPr wrap="square" lIns="0" tIns="0" rIns="0" bIns="0" rtlCol="0" anchor="t"/>
+          <a:lstStyle/>
+          <a:p>
+            <a:pPr indent="0" marL="0">
+              <a:buNone/>
+            </a:pPr>
+            <a:r>
+              <a:rPr lang="en-US" sz="1300" dirty="0">
+                <a:solidFill>
+                  <a:schemeClr val="tx2"/>
+                </a:solidFill>
+              </a:rPr>
+              <a:t>Systemwide average costs first; true manufacturing costs by 1994, because the full shift at once would have been impractical.</a:t>
+            </a:r>
+            <a:endParaRPr lang="en-US" sz="1300" dirty="0"/>
+          </a:p>
+        </p:txBody>
+      </p:sp>
+      <p:sp>
+        <p:nvSpPr>
+          <p:cNvPr id="21" name="Card"/>
+          <p:cNvSpPr/>
+          <p:nvPr/>
+        </p:nvSpPr>
+        <p:spPr>
+          <a:xfrm>
+            <a:off x="4338218" y="4069080"/>
+            <a:ext cx="3515258" cy="2103120"/>
+          </a:xfrm>
+          <a:prstGeom prst="roundRect">
+            <a:avLst>
+              <a:gd name="adj" fmla="val 3478"/>
+            </a:avLst>
+          </a:prstGeom>
+          <a:solidFill>
+            <a:schemeClr val="bg2"/>
+          </a:solidFill>
+          <a:ln w="9525">
+            <a:solidFill>
+              <a:srgbClr val="C4CBD8"/>
+            </a:solidFill>
+            <a:prstDash val="solid"/>
+          </a:ln>
+        </p:spPr>
+      </p:sp>
+      <p:sp>
+        <p:nvSpPr>
+          <p:cNvPr id="22" name="Card label"/>
+          <p:cNvSpPr txBox="1"/>
+          <p:nvPr/>
+        </p:nvSpPr>
+        <p:spPr>
+          <a:xfrm>
+            <a:off x="4521098" y="4197096"/>
+            <a:ext cx="3149498" cy="310896"/>
+          </a:xfrm>
+          <a:prstGeom prst="rect">
+            <a:avLst/>
+          </a:prstGeom>
+          <a:noFill/>
+          <a:ln/>
+        </p:spPr>
+        <p:txBody>
+          <a:bodyPr wrap="square" lIns="0" tIns="0" rIns="0" bIns="0" rtlCol="0" anchor="ctr"/>
+          <a:lstStyle/>
+          <a:p>
+            <a:pPr indent="0" marL="0">
+              <a:buNone/>
+            </a:pPr>
+            <a:r>
+              <a:rPr lang="en-US" sz="1300" b="1" dirty="0">
+                <a:solidFill>
+                  <a:schemeClr val="accent1"/>
+                </a:solidFill>
+              </a:rPr>
+              <a:t>What Meridian takes</a:t>
+            </a:r>
+            <a:endParaRPr lang="en-US" sz="1300" dirty="0"/>
+          </a:p>
+        </p:txBody>
+      </p:sp>
+      <p:sp>
+        <p:nvSpPr>
+          <p:cNvPr id="23" name="Card head"/>
+          <p:cNvSpPr txBox="1"/>
+          <p:nvPr/>
+        </p:nvSpPr>
+        <p:spPr>
+          <a:xfrm>
+            <a:off x="4521098" y="4526280"/>
+            <a:ext cx="3149498" cy="576072"/>
+          </a:xfrm>
+          <a:prstGeom prst="rect">
+            <a:avLst/>
+          </a:prstGeom>
+          <a:noFill/>
+          <a:ln/>
+        </p:spPr>
+        <p:txBody>
+          <a:bodyPr wrap="square" lIns="0" tIns="0" rIns="0" bIns="0" rtlCol="0" anchor="t"/>
+          <a:lstStyle/>
+          <a:p>
+            <a:pPr indent="0" marL="0">
+              <a:buNone/>
+            </a:pPr>
+            <a:r>
+              <a:rPr lang="en-US" sz="1600" b="1" dirty="0">
+                <a:solidFill>
+                  <a:schemeClr val="tx1"/>
+                </a:solidFill>
+                <a:latin typeface="Cambria" pitchFamily="34" charset="0"/>
+                <a:ea typeface="Cambria" pitchFamily="34" charset="-122"/>
+                <a:cs typeface="Cambria" pitchFamily="34" charset="-120"/>
+              </a:rPr>
+              <a:t>Price each commitment's breach</a:t>
+            </a:r>
+            <a:endParaRPr lang="en-US" sz="1600" dirty="0"/>
+          </a:p>
+        </p:txBody>
+      </p:sp>
+      <p:sp>
+        <p:nvSpPr>
+          <p:cNvPr id="24" name="Card text"/>
+          <p:cNvSpPr txBox="1"/>
+          <p:nvPr/>
+        </p:nvSpPr>
+        <p:spPr>
+          <a:xfrm>
+            <a:off x="4521098" y="5175504"/>
+            <a:ext cx="3149498" cy="868680"/>
+          </a:xfrm>
+          <a:prstGeom prst="rect">
+            <a:avLst/>
+          </a:prstGeom>
+          <a:noFill/>
+          <a:ln/>
+        </p:spPr>
+        <p:txBody>
+          <a:bodyPr wrap="square" lIns="0" tIns="0" rIns="0" bIns="0" rtlCol="0" anchor="t"/>
+          <a:lstStyle/>
+          <a:p>
+            <a:pPr indent="0" marL="0">
+              <a:buNone/>
+            </a:pPr>
+            <a:r>
+              <a:rPr lang="en-US" sz="1300" dirty="0">
+                <a:solidFill>
+                  <a:schemeClr val="tx2"/>
+                </a:solidFill>
+              </a:rPr>
+              <a:t>A plan always exists, and the priced violations show where Meridian's commitments clash, and by how much.</a:t>
+            </a:r>
+            <a:endParaRPr lang="en-US" sz="1300" dirty="0"/>
+          </a:p>
+        </p:txBody>
+      </p:sp>
+      <p:sp>
+        <p:nvSpPr>
+          <p:cNvPr id="25" name="Card"/>
+          <p:cNvSpPr/>
+          <p:nvPr/>
+        </p:nvSpPr>
+        <p:spPr>
+          <a:xfrm>
+            <a:off x="8127797" y="4069080"/>
+            <a:ext cx="3515258" cy="2103120"/>
+          </a:xfrm>
+          <a:prstGeom prst="roundRect">
+            <a:avLst>
+              <a:gd name="adj" fmla="val 3478"/>
+            </a:avLst>
+          </a:prstGeom>
+          <a:solidFill>
+            <a:schemeClr val="bg2"/>
+          </a:solidFill>
+          <a:ln w="9525">
+            <a:solidFill>
+              <a:srgbClr val="C4CBD8"/>
+            </a:solidFill>
+            <a:prstDash val="solid"/>
+          </a:ln>
+        </p:spPr>
+      </p:sp>
+      <p:sp>
+        <p:nvSpPr>
+          <p:cNvPr id="26" name="Card label"/>
+          <p:cNvSpPr txBox="1"/>
+          <p:nvPr/>
+        </p:nvSpPr>
+        <p:spPr>
+          <a:xfrm>
+            <a:off x="8310677" y="4197096"/>
+            <a:ext cx="3149498" cy="310896"/>
+          </a:xfrm>
+          <a:prstGeom prst="rect">
+            <a:avLst/>
+          </a:prstGeom>
+          <a:noFill/>
+          <a:ln/>
+        </p:spPr>
+        <p:txBody>
+          <a:bodyPr wrap="square" lIns="0" tIns="0" rIns="0" bIns="0" rtlCol="0" anchor="ctr"/>
+          <a:lstStyle/>
+          <a:p>
+            <a:pPr indent="0" marL="0">
+              <a:buNone/>
+            </a:pPr>
+            <a:r>
+              <a:rPr lang="en-US" sz="1300" b="1" dirty="0">
+                <a:solidFill>
+                  <a:schemeClr val="accent1"/>
+                </a:solidFill>
+              </a:rPr>
+              <a:t>For the board</a:t>
+            </a:r>
+            <a:endParaRPr lang="en-US" sz="1300" dirty="0"/>
+          </a:p>
+        </p:txBody>
+      </p:sp>
+      <p:sp>
+        <p:nvSpPr>
+          <p:cNvPr id="27" name="Card head"/>
+          <p:cNvSpPr txBox="1"/>
+          <p:nvPr/>
+        </p:nvSpPr>
+        <p:spPr>
+          <a:xfrm>
+            <a:off x="8310677" y="4526280"/>
+            <a:ext cx="3149498" cy="576072"/>
+          </a:xfrm>
+          <a:prstGeom prst="rect">
+            <a:avLst/>
+          </a:prstGeom>
+          <a:noFill/>
+          <a:ln/>
+        </p:spPr>
+        <p:txBody>
+          <a:bodyPr wrap="square" lIns="0" tIns="0" rIns="0" bIns="0" rtlCol="0" anchor="t"/>
+          <a:lstStyle/>
+          <a:p>
+            <a:pPr indent="0" marL="0">
+              <a:buNone/>
+            </a:pPr>
+            <a:r>
+              <a:rPr lang="en-US" sz="1600" b="1" dirty="0">
+                <a:solidFill>
+                  <a:schemeClr val="tx1"/>
+                </a:solidFill>
+                <a:latin typeface="Cambria" pitchFamily="34" charset="0"/>
+                <a:ea typeface="Cambria" pitchFamily="34" charset="-122"/>
+                <a:cs typeface="Cambria" pitchFamily="34" charset="-120"/>
+              </a:rPr>
+              <a:t>Who hears when a limit breaks?</a:t>
+            </a:r>
+            <a:endParaRPr lang="en-US" sz="1600" dirty="0"/>
+          </a:p>
+        </p:txBody>
+      </p:sp>
+      <p:sp>
+        <p:nvSpPr>
+          <p:cNvPr id="28" name="Card text"/>
+          <p:cNvSpPr txBox="1"/>
+          <p:nvPr/>
+        </p:nvSpPr>
+        <p:spPr>
+          <a:xfrm>
+            <a:off x="8310677" y="5175504"/>
+            <a:ext cx="3149498" cy="868680"/>
+          </a:xfrm>
+          <a:prstGeom prst="rect">
+            <a:avLst/>
+          </a:prstGeom>
+          <a:noFill/>
+          <a:ln/>
+        </p:spPr>
+        <p:txBody>
+          <a:bodyPr wrap="square" lIns="0" tIns="0" rIns="0" bIns="0" rtlCol="0" anchor="t"/>
+          <a:lstStyle/>
+          <a:p>
+            <a:pPr indent="0" marL="0">
+              <a:buNone/>
+            </a:pPr>
+            <a:r>
+              <a:rPr lang="en-US" sz="1300" dirty="0">
+                <a:solidFill>
+                  <a:schemeClr val="tx2"/>
+                </a:solidFill>
+              </a:rPr>
+              <a:t>When the plan breaks a priced commitment, what does the price say about where to invest?</a:t>
+            </a:r>
+            <a:endParaRPr lang="en-US" sz="1300" dirty="0"/>
           </a:p>
         </p:txBody>
       </p:sp>
@@ -18108,7 +18181,7 @@
                   <a:schemeClr val="accent1"/>
                 </a:solidFill>
               </a:rPr>
-              <a:t>KEY TAKEAWAYS</a:t>
+              <a:t>AXIOM LAB 2.2 · MODULE AXIOM-02</a:t>
             </a:r>
             <a:endParaRPr lang="en-US" sz="1200" dirty="0"/>
           </a:p>
@@ -18149,22 +18222,105 @@
                 <a:ea typeface="Cambria" pitchFamily="34" charset="-122"/>
                 <a:cs typeface="Cambria" pitchFamily="34" charset="-120"/>
               </a:rPr>
-              <a:t>What to carry forward</a:t>
+              <a:t>Building and diagnosing an instance, in AXIOM</a:t>
             </a:r>
             <a:endParaRPr lang="en-US" sz="3200" dirty="0"/>
           </a:p>
         </p:txBody>
       </p:sp>
-      <p:sp>
-        <p:nvSpPr>
-          <p:cNvPr id="5" name="Number"/>
+      <p:pic>
+        <p:nvPicPr>
+          <p:cNvPr id="5" name="AXIOM logo" descr="AXIOM">    </p:cNvPr>
+          <p:cNvPicPr>
+            <a:picLocks noChangeAspect="1"/>
+          </p:cNvPicPr>
+          <p:nvPr/>
+        </p:nvPicPr>
+        <p:blipFill>
+          <a:blip r:embed="rId1"/>
+          <a:stretch>
+            <a:fillRect/>
+          </a:stretch>
+        </p:blipFill>
+        <p:spPr>
+          <a:xfrm>
+            <a:off x="9539935" y="310896"/>
+            <a:ext cx="2103120" cy="420624"/>
+          </a:xfrm>
+          <a:prstGeom prst="rect">
+            <a:avLst/>
+          </a:prstGeom>
+        </p:spPr>
+      </p:pic>
+      <p:sp>
+        <p:nvSpPr>
+          <p:cNvPr id="6" name="Situation"/>
+          <p:cNvSpPr txBox="1"/>
+          <p:nvPr/>
+        </p:nvSpPr>
+        <p:spPr>
+          <a:xfrm>
+            <a:off x="548640" y="1645920"/>
+            <a:ext cx="11094415" cy="777240"/>
+          </a:xfrm>
+          <a:prstGeom prst="rect">
+            <a:avLst/>
+          </a:prstGeom>
+          <a:noFill/>
+          <a:ln/>
+        </p:spPr>
+        <p:txBody>
+          <a:bodyPr wrap="square" lIns="0" tIns="0" rIns="0" bIns="0" rtlCol="0" anchor="t"/>
+          <a:lstStyle/>
+          <a:p>
+            <a:pPr indent="0" marL="0">
+              <a:buNone/>
+            </a:pPr>
+            <a:r>
+              <a:rPr lang="en-US" sz="1500" dirty="0">
+                <a:solidFill>
+                  <a:schemeClr val="tx1"/>
+                </a:solidFill>
+              </a:rPr>
+              <a:t>Meridian's board has two executive pledges on its automation program and a standing rule that every proposal arrives as an instance, not a spreadsheet. You support the chief financial officer. Open AXIOM, choose Lab 2.2 and load the Meridian automation program.</a:t>
+            </a:r>
+            <a:endParaRPr lang="en-US" sz="1500" dirty="0"/>
+          </a:p>
+        </p:txBody>
+      </p:sp>
+      <p:sp>
+        <p:nvSpPr>
+          <p:cNvPr id="7" name="Flow line"/>
           <p:cNvSpPr/>
           <p:nvPr/>
         </p:nvSpPr>
         <p:spPr>
           <a:xfrm>
-            <a:off x="548640" y="1737360"/>
-            <a:ext cx="566928" cy="566928"/>
+            <a:off x="1658082" y="2880360"/>
+            <a:ext cx="8875532" cy="0"/>
+          </a:xfrm>
+          <a:prstGeom prst="line">
+            <a:avLst/>
+          </a:prstGeom>
+          <a:noFill/>
+          <a:ln w="25400">
+            <a:solidFill>
+              <a:srgbClr val="C4CBD8"/>
+            </a:solidFill>
+            <a:prstDash val="solid"/>
+          </a:ln>
+        </p:spPr>
+      </p:sp>
+      <p:sp>
+        <p:nvSpPr>
+          <p:cNvPr id="8" name="Number"/>
+          <p:cNvSpPr/>
+          <p:nvPr/>
+        </p:nvSpPr>
+        <p:spPr>
+          <a:xfrm>
+            <a:off x="1383762" y="2606040"/>
+            <a:ext cx="548640" cy="548640"/>
           </a:xfrm>
           <a:prstGeom prst="ellipse">
             <a:avLst/>
@@ -18182,14 +18338,14 @@
       </p:sp>
       <p:sp>
         <p:nvSpPr>
-          <p:cNvPr id="6" name="Text 3"/>
+          <p:cNvPr id="9" name="Text 5"/>
           <p:cNvSpPr txBox="1"/>
           <p:nvPr/>
         </p:nvSpPr>
         <p:spPr>
           <a:xfrm>
-            <a:off x="548640" y="1737360"/>
-            <a:ext cx="566928" cy="566928"/>
+            <a:off x="1383762" y="2606040"/>
+            <a:ext cx="548640" cy="548640"/>
           </a:xfrm>
           <a:prstGeom prst="rect">
             <a:avLst/>
@@ -18205,7 +18361,7 @@
               <a:buNone/>
             </a:pPr>
             <a:r>
-              <a:rPr lang="en-US" sz="1500" b="1" dirty="0">
+              <a:rPr lang="en-US" sz="1600" b="1" dirty="0">
                 <a:solidFill>
                   <a:schemeClr val="bg1"/>
                 </a:solidFill>
@@ -18215,20 +18371,20 @@
               </a:rPr>
               <a:t>1</a:t>
             </a:r>
-            <a:endParaRPr lang="en-US" sz="1500" dirty="0"/>
-          </a:p>
-        </p:txBody>
-      </p:sp>
-      <p:sp>
-        <p:nvSpPr>
-          <p:cNvPr id="7" name="Row text"/>
+            <a:endParaRPr lang="en-US" sz="1600" dirty="0"/>
+          </a:p>
+        </p:txBody>
+      </p:sp>
+      <p:sp>
+        <p:nvSpPr>
+          <p:cNvPr id="10" name="Flow head"/>
           <p:cNvSpPr txBox="1"/>
           <p:nvPr/>
         </p:nvSpPr>
         <p:spPr>
           <a:xfrm>
-            <a:off x="1325880" y="1691640"/>
-            <a:ext cx="10317175" cy="841248"/>
+            <a:off x="621792" y="3291840"/>
+            <a:ext cx="2072579" cy="548640"/>
           </a:xfrm>
           <a:prstGeom prst="rect">
             <a:avLst/>
@@ -18237,34 +18393,73 @@
           <a:ln/>
         </p:spPr>
         <p:txBody>
-          <a:bodyPr wrap="square" lIns="0" tIns="0" rIns="0" bIns="0" rtlCol="0" anchor="ctr"/>
+          <a:bodyPr wrap="square" lIns="0" tIns="0" rIns="0" bIns="0" rtlCol="0" anchor="t"/>
           <a:lstStyle/>
           <a:p>
-            <a:pPr indent="0" marL="0">
+            <a:pPr algn="ctr" indent="0" marL="0">
               <a:buNone/>
             </a:pPr>
             <a:r>
-              <a:rPr lang="en-US" sz="1500" dirty="0">
+              <a:rPr lang="en-US" sz="1600" b="1" dirty="0">
                 <a:solidFill>
                   <a:schemeClr val="tx1"/>
                 </a:solidFill>
-              </a:rPr>
-              <a:t>A solver takes an instance, not a problem: the GEOP with every declared object filled in, in five blocks—dynamics, admissible decisions, path commitments, start and end conditions, and uncertainty—with empty blocks declared empty.</a:t>
-            </a:r>
-            <a:endParaRPr lang="en-US" sz="1500" dirty="0"/>
-          </a:p>
-        </p:txBody>
-      </p:sp>
-      <p:sp>
-        <p:nvSpPr>
-          <p:cNvPr id="8" name="Number"/>
+                <a:latin typeface="Cambria" pitchFamily="34" charset="0"/>
+                <a:ea typeface="Cambria" pitchFamily="34" charset="-122"/>
+                <a:cs typeface="Cambria" pitchFamily="34" charset="-120"/>
+              </a:rPr>
+              <a:t>Build</a:t>
+            </a:r>
+            <a:endParaRPr lang="en-US" sz="1600" dirty="0"/>
+          </a:p>
+        </p:txBody>
+      </p:sp>
+      <p:sp>
+        <p:nvSpPr>
+          <p:cNvPr id="11" name="Flow text"/>
+          <p:cNvSpPr txBox="1"/>
+          <p:nvPr/>
+        </p:nvSpPr>
+        <p:spPr>
+          <a:xfrm>
+            <a:off x="640080" y="3867912"/>
+            <a:ext cx="2036003" cy="1554480"/>
+          </a:xfrm>
+          <a:prstGeom prst="rect">
+            <a:avLst/>
+          </a:prstGeom>
+          <a:noFill/>
+          <a:ln/>
+        </p:spPr>
+        <p:txBody>
+          <a:bodyPr wrap="square" lIns="0" tIns="0" rIns="0" bIns="0" rtlCol="0" anchor="t"/>
+          <a:lstStyle/>
+          <a:p>
+            <a:pPr algn="ctr" indent="0" marL="0">
+              <a:buNone/>
+            </a:pPr>
+            <a:r>
+              <a:rPr lang="en-US" sz="1400" dirty="0">
+                <a:solidFill>
+                  <a:schemeClr val="tx2"/>
+                </a:solidFill>
+              </a:rPr>
+              <a:t>Declare the five blocks; enter savings as a decision and watch the editor refuse.</a:t>
+            </a:r>
+            <a:endParaRPr lang="en-US" sz="1400" dirty="0"/>
+          </a:p>
+        </p:txBody>
+      </p:sp>
+      <p:sp>
+        <p:nvSpPr>
+          <p:cNvPr id="12" name="Number"/>
           <p:cNvSpPr/>
           <p:nvPr/>
         </p:nvSpPr>
         <p:spPr>
           <a:xfrm>
-            <a:off x="548640" y="2633472"/>
-            <a:ext cx="566928" cy="566928"/>
+            <a:off x="3602645" y="2606040"/>
+            <a:ext cx="548640" cy="548640"/>
           </a:xfrm>
           <a:prstGeom prst="ellipse">
             <a:avLst/>
@@ -18282,14 +18477,14 @@
       </p:sp>
       <p:sp>
         <p:nvSpPr>
-          <p:cNvPr id="9" name="Text 6"/>
+          <p:cNvPr id="13" name="Text 9"/>
           <p:cNvSpPr txBox="1"/>
           <p:nvPr/>
         </p:nvSpPr>
         <p:spPr>
           <a:xfrm>
-            <a:off x="548640" y="2633472"/>
-            <a:ext cx="566928" cy="566928"/>
+            <a:off x="3602645" y="2606040"/>
+            <a:ext cx="548640" cy="548640"/>
           </a:xfrm>
           <a:prstGeom prst="rect">
             <a:avLst/>
@@ -18305,7 +18500,7 @@
               <a:buNone/>
             </a:pPr>
             <a:r>
-              <a:rPr lang="en-US" sz="1500" b="1" dirty="0">
+              <a:rPr lang="en-US" sz="1600" b="1" dirty="0">
                 <a:solidFill>
                   <a:schemeClr val="bg1"/>
                 </a:solidFill>
@@ -18315,20 +18510,20 @@
               </a:rPr>
               <a:t>2</a:t>
             </a:r>
-            <a:endParaRPr lang="en-US" sz="1500" dirty="0"/>
-          </a:p>
-        </p:txBody>
-      </p:sp>
-      <p:sp>
-        <p:nvSpPr>
-          <p:cNvPr id="10" name="Row text"/>
+            <a:endParaRPr lang="en-US" sz="1600" dirty="0"/>
+          </a:p>
+        </p:txBody>
+      </p:sp>
+      <p:sp>
+        <p:nvSpPr>
+          <p:cNvPr id="14" name="Flow head"/>
           <p:cNvSpPr txBox="1"/>
           <p:nvPr/>
         </p:nvSpPr>
         <p:spPr>
           <a:xfrm>
-            <a:off x="1325880" y="2587752"/>
-            <a:ext cx="10317175" cy="841248"/>
+            <a:off x="2840675" y="3291840"/>
+            <a:ext cx="2072579" cy="548640"/>
           </a:xfrm>
           <a:prstGeom prst="rect">
             <a:avLst/>
@@ -18337,34 +18532,73 @@
           <a:ln/>
         </p:spPr>
         <p:txBody>
-          <a:bodyPr wrap="square" lIns="0" tIns="0" rIns="0" bIns="0" rtlCol="0" anchor="ctr"/>
+          <a:bodyPr wrap="square" lIns="0" tIns="0" rIns="0" bIns="0" rtlCol="0" anchor="t"/>
           <a:lstStyle/>
           <a:p>
-            <a:pPr indent="0" marL="0">
+            <a:pPr algn="ctr" indent="0" marL="0">
               <a:buNone/>
             </a:pPr>
             <a:r>
-              <a:rPr lang="en-US" sz="1500" dirty="0">
+              <a:rPr lang="en-US" sz="1600" b="1" dirty="0">
                 <a:solidFill>
                   <a:schemeClr val="tx1"/>
                 </a:solidFill>
-              </a:rPr>
-              <a:t>Decisions are chosen and states are induced; every claim about a plan's value or feasibility is a simulation anyone can rerun.</a:t>
-            </a:r>
-            <a:endParaRPr lang="en-US" sz="1500" dirty="0"/>
-          </a:p>
-        </p:txBody>
-      </p:sp>
-      <p:sp>
-        <p:nvSpPr>
-          <p:cNvPr id="11" name="Number"/>
+                <a:latin typeface="Cambria" pitchFamily="34" charset="0"/>
+                <a:ea typeface="Cambria" pitchFamily="34" charset="-122"/>
+                <a:cs typeface="Cambria" pitchFamily="34" charset="-120"/>
+              </a:rPr>
+              <a:t>Check</a:t>
+            </a:r>
+            <a:endParaRPr lang="en-US" sz="1600" dirty="0"/>
+          </a:p>
+        </p:txBody>
+      </p:sp>
+      <p:sp>
+        <p:nvSpPr>
+          <p:cNvPr id="15" name="Flow text"/>
+          <p:cNvSpPr txBox="1"/>
+          <p:nvPr/>
+        </p:nvSpPr>
+        <p:spPr>
+          <a:xfrm>
+            <a:off x="2858963" y="3867912"/>
+            <a:ext cx="2036003" cy="1554480"/>
+          </a:xfrm>
+          <a:prstGeom prst="rect">
+            <a:avLst/>
+          </a:prstGeom>
+          <a:noFill/>
+          <a:ln/>
+        </p:spPr>
+        <p:txBody>
+          <a:bodyPr wrap="square" lIns="0" tIns="0" rIns="0" bIns="0" rtlCol="0" anchor="t"/>
+          <a:lstStyle/>
+          <a:p>
+            <a:pPr algn="ctr" indent="0" marL="0">
+              <a:buNone/>
+            </a:pPr>
+            <a:r>
+              <a:rPr lang="en-US" sz="1400" dirty="0">
+                <a:solidFill>
+                  <a:schemeClr val="tx2"/>
+                </a:solidFill>
+              </a:rPr>
+              <a:t>Run the joint plan forward and find the year it dies; compare the COO's plan with all savings kept.</a:t>
+            </a:r>
+            <a:endParaRPr lang="en-US" sz="1400" dirty="0"/>
+          </a:p>
+        </p:txBody>
+      </p:sp>
+      <p:sp>
+        <p:nvSpPr>
+          <p:cNvPr id="16" name="Number"/>
           <p:cNvSpPr/>
           <p:nvPr/>
         </p:nvSpPr>
         <p:spPr>
           <a:xfrm>
-            <a:off x="548640" y="3529584"/>
-            <a:ext cx="566928" cy="566928"/>
+            <a:off x="5821528" y="2606040"/>
+            <a:ext cx="548640" cy="548640"/>
           </a:xfrm>
           <a:prstGeom prst="ellipse">
             <a:avLst/>
@@ -18382,14 +18616,14 @@
       </p:sp>
       <p:sp>
         <p:nvSpPr>
-          <p:cNvPr id="12" name="Text 9"/>
+          <p:cNvPr id="17" name="Text 13"/>
           <p:cNvSpPr txBox="1"/>
           <p:nvPr/>
         </p:nvSpPr>
         <p:spPr>
           <a:xfrm>
-            <a:off x="548640" y="3529584"/>
-            <a:ext cx="566928" cy="566928"/>
+            <a:off x="5821528" y="2606040"/>
+            <a:ext cx="548640" cy="548640"/>
           </a:xfrm>
           <a:prstGeom prst="rect">
             <a:avLst/>
@@ -18405,7 +18639,7 @@
               <a:buNone/>
             </a:pPr>
             <a:r>
-              <a:rPr lang="en-US" sz="1500" b="1" dirty="0">
+              <a:rPr lang="en-US" sz="1600" b="1" dirty="0">
                 <a:solidFill>
                   <a:schemeClr val="bg1"/>
                 </a:solidFill>
@@ -18415,20 +18649,20 @@
               </a:rPr>
               <a:t>3</a:t>
             </a:r>
-            <a:endParaRPr lang="en-US" sz="1500" dirty="0"/>
-          </a:p>
-        </p:txBody>
-      </p:sp>
-      <p:sp>
-        <p:nvSpPr>
-          <p:cNvPr id="13" name="Row text"/>
+            <a:endParaRPr lang="en-US" sz="1600" dirty="0"/>
+          </a:p>
+        </p:txBody>
+      </p:sp>
+      <p:sp>
+        <p:nvSpPr>
+          <p:cNvPr id="18" name="Flow head"/>
           <p:cNvSpPr txBox="1"/>
           <p:nvPr/>
         </p:nvSpPr>
         <p:spPr>
           <a:xfrm>
-            <a:off x="1325880" y="3483864"/>
-            <a:ext cx="10317175" cy="841248"/>
+            <a:off x="5059558" y="3291840"/>
+            <a:ext cx="2072579" cy="548640"/>
           </a:xfrm>
           <a:prstGeom prst="rect">
             <a:avLst/>
@@ -18437,34 +18671,73 @@
           <a:ln/>
         </p:spPr>
         <p:txBody>
-          <a:bodyPr wrap="square" lIns="0" tIns="0" rIns="0" bIns="0" rtlCol="0" anchor="ctr"/>
+          <a:bodyPr wrap="square" lIns="0" tIns="0" rIns="0" bIns="0" rtlCol="0" anchor="t"/>
           <a:lstStyle/>
           <a:p>
-            <a:pPr indent="0" marL="0">
+            <a:pPr algn="ctr" indent="0" marL="0">
               <a:buNone/>
             </a:pPr>
             <a:r>
-              <a:rPr lang="en-US" sz="1500" dirty="0">
+              <a:rPr lang="en-US" sz="1600" b="1" dirty="0">
                 <a:solidFill>
                   <a:schemeClr val="tx1"/>
                 </a:solidFill>
-              </a:rPr>
-              <a:t>How an objective is written is free; what it counts is governance. Running and terminal forms interconvert and units change nothing, but the terminal credit, the weights, the horizon, and a commitment's quantifier can each change the answer.</a:t>
-            </a:r>
-            <a:endParaRPr lang="en-US" sz="1500" dirty="0"/>
-          </a:p>
-        </p:txBody>
-      </p:sp>
-      <p:sp>
-        <p:nvSpPr>
-          <p:cNvPr id="14" name="Number"/>
+                <a:latin typeface="Cambria" pitchFamily="34" charset="0"/>
+                <a:ea typeface="Cambria" pitchFamily="34" charset="-122"/>
+                <a:cs typeface="Cambria" pitchFamily="34" charset="-120"/>
+              </a:rPr>
+              <a:t>Diagnose</a:t>
+            </a:r>
+            <a:endParaRPr lang="en-US" sz="1600" dirty="0"/>
+          </a:p>
+        </p:txBody>
+      </p:sp>
+      <p:sp>
+        <p:nvSpPr>
+          <p:cNvPr id="19" name="Flow text"/>
+          <p:cNvSpPr txBox="1"/>
+          <p:nvPr/>
+        </p:nvSpPr>
+        <p:spPr>
+          <a:xfrm>
+            <a:off x="5077846" y="3867912"/>
+            <a:ext cx="2036003" cy="1554480"/>
+          </a:xfrm>
+          <a:prstGeom prst="rect">
+            <a:avLst/>
+          </a:prstGeom>
+          <a:noFill/>
+          <a:ln/>
+        </p:spPr>
+        <p:txBody>
+          <a:bodyPr wrap="square" lIns="0" tIns="0" rIns="0" bIns="0" rtlCol="0" anchor="t"/>
+          <a:lstStyle/>
+          <a:p>
+            <a:pPr algn="ctr" indent="0" marL="0">
+              <a:buNone/>
+            </a:pPr>
+            <a:r>
+              <a:rPr lang="en-US" sz="1400" dirty="0">
+                <a:solidFill>
+                  <a:schemeClr val="tx2"/>
+                </a:solidFill>
+              </a:rPr>
+              <a:t>Run the deletion filter twice and record both clashes; drop the floor alone.</a:t>
+            </a:r>
+            <a:endParaRPr lang="en-US" sz="1400" dirty="0"/>
+          </a:p>
+        </p:txBody>
+      </p:sp>
+      <p:sp>
+        <p:nvSpPr>
+          <p:cNvPr id="20" name="Number"/>
           <p:cNvSpPr/>
           <p:nvPr/>
         </p:nvSpPr>
         <p:spPr>
           <a:xfrm>
-            <a:off x="548640" y="4425696"/>
-            <a:ext cx="566928" cy="566928"/>
+            <a:off x="8040411" y="2606040"/>
+            <a:ext cx="548640" cy="548640"/>
           </a:xfrm>
           <a:prstGeom prst="ellipse">
             <a:avLst/>
@@ -18482,14 +18755,14 @@
       </p:sp>
       <p:sp>
         <p:nvSpPr>
-          <p:cNvPr id="15" name="Text 12"/>
+          <p:cNvPr id="21" name="Text 17"/>
           <p:cNvSpPr txBox="1"/>
           <p:nvPr/>
         </p:nvSpPr>
         <p:spPr>
           <a:xfrm>
-            <a:off x="548640" y="4425696"/>
-            <a:ext cx="566928" cy="566928"/>
+            <a:off x="8040411" y="2606040"/>
+            <a:ext cx="548640" cy="548640"/>
           </a:xfrm>
           <a:prstGeom prst="rect">
             <a:avLst/>
@@ -18505,7 +18778,7 @@
               <a:buNone/>
             </a:pPr>
             <a:r>
-              <a:rPr lang="en-US" sz="1500" b="1" dirty="0">
+              <a:rPr lang="en-US" sz="1600" b="1" dirty="0">
                 <a:solidFill>
                   <a:schemeClr val="bg1"/>
                 </a:solidFill>
@@ -18515,20 +18788,20 @@
               </a:rPr>
               <a:t>4</a:t>
             </a:r>
-            <a:endParaRPr lang="en-US" sz="1500" dirty="0"/>
-          </a:p>
-        </p:txBody>
-      </p:sp>
-      <p:sp>
-        <p:nvSpPr>
-          <p:cNvPr id="16" name="Row text"/>
+            <a:endParaRPr lang="en-US" sz="1600" dirty="0"/>
+          </a:p>
+        </p:txBody>
+      </p:sp>
+      <p:sp>
+        <p:nvSpPr>
+          <p:cNvPr id="22" name="Flow head"/>
           <p:cNvSpPr txBox="1"/>
           <p:nvPr/>
         </p:nvSpPr>
         <p:spPr>
           <a:xfrm>
-            <a:off x="1325880" y="4379976"/>
-            <a:ext cx="10317175" cy="841248"/>
+            <a:off x="7278441" y="3291840"/>
+            <a:ext cx="2072579" cy="548640"/>
           </a:xfrm>
           <a:prstGeom prst="rect">
             <a:avLst/>
@@ -18537,34 +18810,73 @@
           <a:ln/>
         </p:spPr>
         <p:txBody>
-          <a:bodyPr wrap="square" lIns="0" tIns="0" rIns="0" bIns="0" rtlCol="0" anchor="ctr"/>
+          <a:bodyPr wrap="square" lIns="0" tIns="0" rIns="0" bIns="0" rtlCol="0" anchor="t"/>
           <a:lstStyle/>
           <a:p>
-            <a:pPr indent="0" marL="0">
+            <a:pPr algn="ctr" indent="0" marL="0">
               <a:buNone/>
             </a:pPr>
             <a:r>
-              <a:rPr lang="en-US" sz="1500" dirty="0">
+              <a:rPr lang="en-US" sz="1600" b="1" dirty="0">
                 <a:solidFill>
                   <a:schemeClr val="tx1"/>
                 </a:solidFill>
-              </a:rPr>
-              <a:t>Convexity is read block by block and dies at lumpy decisions, nonlinear dynamics, nonconvex commitments, and feedback rules; infeasibility is diagnosed as named clashes and a date, and a repair must break every clash.</a:t>
-            </a:r>
-            <a:endParaRPr lang="en-US" sz="1500" dirty="0"/>
-          </a:p>
-        </p:txBody>
-      </p:sp>
-      <p:sp>
-        <p:nvSpPr>
-          <p:cNvPr id="17" name="Number"/>
+                <a:latin typeface="Cambria" pitchFamily="34" charset="0"/>
+                <a:ea typeface="Cambria" pitchFamily="34" charset="-122"/>
+                <a:cs typeface="Cambria" pitchFamily="34" charset="-120"/>
+              </a:rPr>
+              <a:t>Price</a:t>
+            </a:r>
+            <a:endParaRPr lang="en-US" sz="1600" dirty="0"/>
+          </a:p>
+        </p:txBody>
+      </p:sp>
+      <p:sp>
+        <p:nvSpPr>
+          <p:cNvPr id="23" name="Flow text"/>
+          <p:cNvSpPr txBox="1"/>
+          <p:nvPr/>
+        </p:nvSpPr>
+        <p:spPr>
+          <a:xfrm>
+            <a:off x="7296729" y="3867912"/>
+            <a:ext cx="2036003" cy="1554480"/>
+          </a:xfrm>
+          <a:prstGeom prst="rect">
+            <a:avLst/>
+          </a:prstGeom>
+          <a:noFill/>
+          <a:ln/>
+        </p:spPr>
+        <p:txBody>
+          <a:bodyPr wrap="square" lIns="0" tIns="0" rIns="0" bIns="0" rtlCol="0" anchor="t"/>
+          <a:lstStyle/>
+          <a:p>
+            <a:pPr algn="ctr" indent="0" marL="0">
+              <a:buNone/>
+            </a:pPr>
+            <a:r>
+              <a:rPr lang="en-US" sz="1400" dirty="0">
+                <a:solidFill>
+                  <a:schemeClr val="tx2"/>
+                </a:solidFill>
+              </a:rPr>
+              <a:t>Find the largest payout share or the most rounds each repair allows; rebuild Table 2.7.</a:t>
+            </a:r>
+            <a:endParaRPr lang="en-US" sz="1400" dirty="0"/>
+          </a:p>
+        </p:txBody>
+      </p:sp>
+      <p:sp>
+        <p:nvSpPr>
+          <p:cNvPr id="24" name="Number"/>
           <p:cNvSpPr/>
           <p:nvPr/>
         </p:nvSpPr>
         <p:spPr>
           <a:xfrm>
-            <a:off x="548640" y="5321808"/>
-            <a:ext cx="566928" cy="566928"/>
+            <a:off x="10259294" y="2606040"/>
+            <a:ext cx="548640" cy="548640"/>
           </a:xfrm>
           <a:prstGeom prst="ellipse">
             <a:avLst/>
@@ -18582,14 +18894,14 @@
       </p:sp>
       <p:sp>
         <p:nvSpPr>
-          <p:cNvPr id="18" name="Text 15"/>
+          <p:cNvPr id="25" name="Text 21"/>
           <p:cNvSpPr txBox="1"/>
           <p:nvPr/>
         </p:nvSpPr>
         <p:spPr>
           <a:xfrm>
-            <a:off x="548640" y="5321808"/>
-            <a:ext cx="566928" cy="566928"/>
+            <a:off x="10259294" y="2606040"/>
+            <a:ext cx="548640" cy="548640"/>
           </a:xfrm>
           <a:prstGeom prst="rect">
             <a:avLst/>
@@ -18605,7 +18917,7 @@
               <a:buNone/>
             </a:pPr>
             <a:r>
-              <a:rPr lang="en-US" sz="1500" b="1" dirty="0">
+              <a:rPr lang="en-US" sz="1600" b="1" dirty="0">
                 <a:solidFill>
                   <a:schemeClr val="bg1"/>
                 </a:solidFill>
@@ -18615,20 +18927,20 @@
               </a:rPr>
               <a:t>5</a:t>
             </a:r>
-            <a:endParaRPr lang="en-US" sz="1500" dirty="0"/>
-          </a:p>
-        </p:txBody>
-      </p:sp>
-      <p:sp>
-        <p:nvSpPr>
-          <p:cNvPr id="19" name="Row text"/>
+            <a:endParaRPr lang="en-US" sz="1600" dirty="0"/>
+          </a:p>
+        </p:txBody>
+      </p:sp>
+      <p:sp>
+        <p:nvSpPr>
+          <p:cNvPr id="26" name="Flow head"/>
           <p:cNvSpPr txBox="1"/>
           <p:nvPr/>
         </p:nvSpPr>
         <p:spPr>
           <a:xfrm>
-            <a:off x="1325880" y="5276088"/>
-            <a:ext cx="10317175" cy="841248"/>
+            <a:off x="9497324" y="3291840"/>
+            <a:ext cx="2072579" cy="548640"/>
           </a:xfrm>
           <a:prstGeom prst="rect">
             <a:avLst/>
@@ -18637,6 +18949,108 @@
           <a:ln/>
         </p:spPr>
         <p:txBody>
+          <a:bodyPr wrap="square" lIns="0" tIns="0" rIns="0" bIns="0" rtlCol="0" anchor="t"/>
+          <a:lstStyle/>
+          <a:p>
+            <a:pPr algn="ctr" indent="0" marL="0">
+              <a:buNone/>
+            </a:pPr>
+            <a:r>
+              <a:rPr lang="en-US" sz="1600" b="1" dirty="0">
+                <a:solidFill>
+                  <a:schemeClr val="tx1"/>
+                </a:solidFill>
+                <a:latin typeface="Cambria" pitchFamily="34" charset="0"/>
+                <a:ea typeface="Cambria" pitchFamily="34" charset="-122"/>
+                <a:cs typeface="Cambria" pitchFamily="34" charset="-120"/>
+              </a:rPr>
+              <a:t>Reweight</a:t>
+            </a:r>
+            <a:endParaRPr lang="en-US" sz="1600" dirty="0"/>
+          </a:p>
+        </p:txBody>
+      </p:sp>
+      <p:sp>
+        <p:nvSpPr>
+          <p:cNvPr id="27" name="Flow text"/>
+          <p:cNvSpPr txBox="1"/>
+          <p:nvPr/>
+        </p:nvSpPr>
+        <p:spPr>
+          <a:xfrm>
+            <a:off x="9515612" y="3867912"/>
+            <a:ext cx="2036003" cy="1554480"/>
+          </a:xfrm>
+          <a:prstGeom prst="rect">
+            <a:avLst/>
+          </a:prstGeom>
+          <a:noFill/>
+          <a:ln/>
+        </p:spPr>
+        <p:txBody>
+          <a:bodyPr wrap="square" lIns="0" tIns="0" rIns="0" bIns="0" rtlCol="0" anchor="t"/>
+          <a:lstStyle/>
+          <a:p>
+            <a:pPr algn="ctr" indent="0" marL="0">
+              <a:buNone/>
+            </a:pPr>
+            <a:r>
+              <a:rPr lang="en-US" sz="1400" dirty="0">
+                <a:solidFill>
+                  <a:schemeClr val="tx2"/>
+                </a:solidFill>
+              </a:rPr>
+              <a:t>Move the terminal credit from 0 to 60 years; switch to Mayer form; export in standard form.</a:t>
+            </a:r>
+            <a:endParaRPr lang="en-US" sz="1400" dirty="0"/>
+          </a:p>
+        </p:txBody>
+      </p:sp>
+      <p:sp>
+        <p:nvSpPr>
+          <p:cNvPr id="28" name="Deliverable card"/>
+          <p:cNvSpPr/>
+          <p:nvPr/>
+        </p:nvSpPr>
+        <p:spPr>
+          <a:xfrm>
+            <a:off x="548640" y="5486400"/>
+            <a:ext cx="11094415" cy="685800"/>
+          </a:xfrm>
+          <a:prstGeom prst="roundRect">
+            <a:avLst>
+              <a:gd name="adj" fmla="val 10667"/>
+            </a:avLst>
+          </a:prstGeom>
+          <a:solidFill>
+            <a:schemeClr val="bg2"/>
+          </a:solidFill>
+          <a:ln w="9525">
+            <a:solidFill>
+              <a:srgbClr val="C4CBD8"/>
+            </a:solidFill>
+            <a:prstDash val="solid"/>
+          </a:ln>
+        </p:spPr>
+      </p:sp>
+      <p:sp>
+        <p:nvSpPr>
+          <p:cNvPr id="29" name="Deliverable"/>
+          <p:cNvSpPr txBox="1"/>
+          <p:nvPr/>
+        </p:nvSpPr>
+        <p:spPr>
+          <a:xfrm>
+            <a:off x="777240" y="5559552"/>
+            <a:ext cx="10637215" cy="539496"/>
+          </a:xfrm>
+          <a:prstGeom prst="rect">
+            <a:avLst/>
+          </a:prstGeom>
+          <a:noFill/>
+          <a:ln/>
+        </p:spPr>
+        <p:txBody>
           <a:bodyPr wrap="square" lIns="0" tIns="0" rIns="0" bIns="0" rtlCol="0" anchor="ctr"/>
           <a:lstStyle/>
           <a:p>
@@ -18644,14 +19058,22 @@
               <a:buNone/>
             </a:pPr>
             <a:r>
-              <a:rPr lang="en-US" sz="1500" dirty="0">
+              <a:rPr lang="en-US" sz="1400" b="1" dirty="0">
                 <a:solidFill>
                   <a:schemeClr val="tx1"/>
                 </a:solidFill>
               </a:rPr>
-              <a:t>Classes route instances to methods, preparation makes them solvable, and a certified instance is owed an optimum, checkable conditions, prices, and stable values, whatever method solves it.</a:t>
-            </a:r>
-            <a:endParaRPr lang="en-US" sz="1500" dirty="0"/>
+              <a:t>Deliverable:</a:t>
+            </a:r>
+            <a:r>
+              <a:rPr lang="en-US" sz="1400" dirty="0">
+                <a:solidFill>
+                  <a:schemeClr val="tx1"/>
+                </a:solidFill>
+              </a:rPr>
+              <a:t> a one-page note to the board: the instance card, the year the joint plan dies, the two clashes, the three repairs with their prices, and a recommendation on the terminal credit, with its owner. About 75 minutes.</a:t>
+            </a:r>
+            <a:endParaRPr lang="en-US" sz="1400" dirty="0"/>
           </a:p>
         </p:txBody>
       </p:sp>
@@ -18757,7 +19179,7 @@
                   <a:schemeClr val="accent1"/>
                 </a:solidFill>
               </a:rPr>
-              <a:t>THIS WEEK'S LABORATORY</a:t>
+              <a:t>KEY TAKEAWAYS</a:t>
             </a:r>
             <a:endParaRPr lang="en-US" sz="1200" dirty="0"/>
           </a:p>
@@ -18798,7 +19220,7 @@
                 <a:ea typeface="Cambria" pitchFamily="34" charset="-122"/>
                 <a:cs typeface="Cambria" pitchFamily="34" charset="-120"/>
               </a:rPr>
-              <a:t>Notebook and workbook reproduce the book</a:t>
+              <a:t>What to carry forward</a:t>
             </a:r>
             <a:endParaRPr lang="en-US" sz="3200" dirty="0"/>
           </a:p>
@@ -18806,26 +19228,24 @@
       </p:sp>
       <p:sp>
         <p:nvSpPr>
-          <p:cNvPr id="5" name="Stat card"/>
+          <p:cNvPr id="5" name="Number"/>
           <p:cNvSpPr/>
           <p:nvPr/>
         </p:nvSpPr>
         <p:spPr>
           <a:xfrm>
-            <a:off x="548640" y="1691640"/>
-            <a:ext cx="2567864" cy="1691640"/>
-          </a:xfrm>
-          <a:prstGeom prst="roundRect">
-            <a:avLst>
-              <a:gd name="adj" fmla="val 4324"/>
-            </a:avLst>
+            <a:off x="548640" y="1737360"/>
+            <a:ext cx="566928" cy="566928"/>
+          </a:xfrm>
+          <a:prstGeom prst="ellipse">
+            <a:avLst/>
           </a:prstGeom>
           <a:solidFill>
-            <a:schemeClr val="tx1"/>
+            <a:schemeClr val="accent1"/>
           </a:solidFill>
-          <a:ln w="9525">
+          <a:ln w="6350">
             <a:solidFill>
-              <a:srgbClr val="0F1E3D"/>
+              <a:schemeClr val="accent1"/>
             </a:solidFill>
             <a:prstDash val="solid"/>
           </a:ln>
@@ -18833,14 +19253,14 @@
       </p:sp>
       <p:sp>
         <p:nvSpPr>
-          <p:cNvPr id="6" name="Stat value"/>
+          <p:cNvPr id="6" name="Text 3"/>
           <p:cNvSpPr txBox="1"/>
           <p:nvPr/>
         </p:nvSpPr>
         <p:spPr>
           <a:xfrm>
-            <a:off x="685800" y="1801368"/>
-            <a:ext cx="2293544" cy="914400"/>
+            <a:off x="548640" y="1737360"/>
+            <a:ext cx="566928" cy="566928"/>
           </a:xfrm>
           <a:prstGeom prst="rect">
             <a:avLst/>
@@ -18856,30 +19276,30 @@
               <a:buNone/>
             </a:pPr>
             <a:r>
-              <a:rPr lang="en-US" sz="4400" b="1" dirty="0">
-                <a:solidFill>
-                  <a:schemeClr val="accent1"/>
-                </a:solidFill>
-                <a:latin typeface="Cambria" pitchFamily="34" charset="0"/>
-                <a:ea typeface="Cambria" pitchFamily="34" charset="-122"/>
-                <a:cs typeface="Cambria" pitchFamily="34" charset="-120"/>
-              </a:rPr>
-              <a:t>55</a:t>
-            </a:r>
-            <a:endParaRPr lang="en-US" sz="4400" dirty="0"/>
-          </a:p>
-        </p:txBody>
-      </p:sp>
-      <p:sp>
-        <p:nvSpPr>
-          <p:cNvPr id="7" name="Stat label"/>
+              <a:rPr lang="en-US" sz="1500" b="1" dirty="0">
+                <a:solidFill>
+                  <a:schemeClr val="bg1"/>
+                </a:solidFill>
+                <a:latin typeface="Calibri" pitchFamily="34" charset="0"/>
+                <a:ea typeface="Calibri" pitchFamily="34" charset="-122"/>
+                <a:cs typeface="Calibri" pitchFamily="34" charset="-120"/>
+              </a:rPr>
+              <a:t>1</a:t>
+            </a:r>
+            <a:endParaRPr lang="en-US" sz="1500" dirty="0"/>
+          </a:p>
+        </p:txBody>
+      </p:sp>
+      <p:sp>
+        <p:nvSpPr>
+          <p:cNvPr id="7" name="Row text"/>
           <p:cNvSpPr txBox="1"/>
           <p:nvPr/>
         </p:nvSpPr>
         <p:spPr>
           <a:xfrm>
-            <a:off x="685800" y="2697480"/>
-            <a:ext cx="2293544" cy="612648"/>
+            <a:off x="1325880" y="1691640"/>
+            <a:ext cx="10317175" cy="841248"/>
           </a:xfrm>
           <a:prstGeom prst="rect">
             <a:avLst/>
@@ -18888,46 +19308,44 @@
           <a:ln/>
         </p:spPr>
         <p:txBody>
-          <a:bodyPr wrap="square" lIns="0" tIns="0" rIns="0" bIns="0" rtlCol="0" anchor="t"/>
+          <a:bodyPr wrap="square" lIns="0" tIns="0" rIns="0" bIns="0" rtlCol="0" anchor="ctr"/>
           <a:lstStyle/>
           <a:p>
-            <a:pPr algn="ctr" indent="0" marL="0">
+            <a:pPr indent="0" marL="0">
               <a:buNone/>
             </a:pPr>
             <a:r>
-              <a:rPr lang="en-US" sz="1400" dirty="0">
-                <a:solidFill>
-                  <a:schemeClr val="bg2"/>
-                </a:solidFill>
-              </a:rPr>
-              <a:t>notebook checkpoints, every one PASS</a:t>
-            </a:r>
-            <a:endParaRPr lang="en-US" sz="1400" dirty="0"/>
-          </a:p>
-        </p:txBody>
-      </p:sp>
-      <p:sp>
-        <p:nvSpPr>
-          <p:cNvPr id="8" name="Stat card"/>
+              <a:rPr lang="en-US" sz="1500" dirty="0">
+                <a:solidFill>
+                  <a:schemeClr val="tx1"/>
+                </a:solidFill>
+              </a:rPr>
+              <a:t>A solver takes an instance, not a problem: the GEOP with every declared object filled in, in five blocks—dynamics, admissible decisions, path commitments, start and end conditions, and uncertainty—with empty blocks declared empty.</a:t>
+            </a:r>
+            <a:endParaRPr lang="en-US" sz="1500" dirty="0"/>
+          </a:p>
+        </p:txBody>
+      </p:sp>
+      <p:sp>
+        <p:nvSpPr>
+          <p:cNvPr id="8" name="Number"/>
           <p:cNvSpPr/>
           <p:nvPr/>
         </p:nvSpPr>
         <p:spPr>
           <a:xfrm>
-            <a:off x="3390824" y="1691640"/>
-            <a:ext cx="2567864" cy="1691640"/>
-          </a:xfrm>
-          <a:prstGeom prst="roundRect">
-            <a:avLst>
-              <a:gd name="adj" fmla="val 4324"/>
-            </a:avLst>
+            <a:off x="548640" y="2633472"/>
+            <a:ext cx="566928" cy="566928"/>
+          </a:xfrm>
+          <a:prstGeom prst="ellipse">
+            <a:avLst/>
           </a:prstGeom>
           <a:solidFill>
-            <a:schemeClr val="bg2"/>
+            <a:schemeClr val="accent1"/>
           </a:solidFill>
-          <a:ln w="9525">
+          <a:ln w="6350">
             <a:solidFill>
-              <a:srgbClr val="C4CBD8"/>
+              <a:schemeClr val="accent1"/>
             </a:solidFill>
             <a:prstDash val="solid"/>
           </a:ln>
@@ -18935,14 +19353,14 @@
       </p:sp>
       <p:sp>
         <p:nvSpPr>
-          <p:cNvPr id="9" name="Stat value"/>
+          <p:cNvPr id="9" name="Text 6"/>
           <p:cNvSpPr txBox="1"/>
           <p:nvPr/>
         </p:nvSpPr>
         <p:spPr>
           <a:xfrm>
-            <a:off x="3527984" y="1801368"/>
-            <a:ext cx="2293544" cy="914400"/>
+            <a:off x="548640" y="2633472"/>
+            <a:ext cx="566928" cy="566928"/>
           </a:xfrm>
           <a:prstGeom prst="rect">
             <a:avLst/>
@@ -18958,30 +19376,30 @@
               <a:buNone/>
             </a:pPr>
             <a:r>
-              <a:rPr lang="en-US" sz="4400" b="1" dirty="0">
-                <a:solidFill>
-                  <a:schemeClr val="tx1"/>
-                </a:solidFill>
-                <a:latin typeface="Cambria" pitchFamily="34" charset="0"/>
-                <a:ea typeface="Cambria" pitchFamily="34" charset="-122"/>
-                <a:cs typeface="Cambria" pitchFamily="34" charset="-120"/>
-              </a:rPr>
-              <a:t>66</a:t>
-            </a:r>
-            <a:endParaRPr lang="en-US" sz="4400" dirty="0"/>
-          </a:p>
-        </p:txBody>
-      </p:sp>
-      <p:sp>
-        <p:nvSpPr>
-          <p:cNvPr id="10" name="Stat label"/>
+              <a:rPr lang="en-US" sz="1500" b="1" dirty="0">
+                <a:solidFill>
+                  <a:schemeClr val="bg1"/>
+                </a:solidFill>
+                <a:latin typeface="Calibri" pitchFamily="34" charset="0"/>
+                <a:ea typeface="Calibri" pitchFamily="34" charset="-122"/>
+                <a:cs typeface="Calibri" pitchFamily="34" charset="-120"/>
+              </a:rPr>
+              <a:t>2</a:t>
+            </a:r>
+            <a:endParaRPr lang="en-US" sz="1500" dirty="0"/>
+          </a:p>
+        </p:txBody>
+      </p:sp>
+      <p:sp>
+        <p:nvSpPr>
+          <p:cNvPr id="10" name="Row text"/>
           <p:cNvSpPr txBox="1"/>
           <p:nvPr/>
         </p:nvSpPr>
         <p:spPr>
           <a:xfrm>
-            <a:off x="3527984" y="2697480"/>
-            <a:ext cx="2293544" cy="612648"/>
+            <a:off x="1325880" y="2587752"/>
+            <a:ext cx="10317175" cy="841248"/>
           </a:xfrm>
           <a:prstGeom prst="rect">
             <a:avLst/>
@@ -18990,46 +19408,44 @@
           <a:ln/>
         </p:spPr>
         <p:txBody>
-          <a:bodyPr wrap="square" lIns="0" tIns="0" rIns="0" bIns="0" rtlCol="0" anchor="t"/>
+          <a:bodyPr wrap="square" lIns="0" tIns="0" rIns="0" bIns="0" rtlCol="0" anchor="ctr"/>
           <a:lstStyle/>
           <a:p>
-            <a:pPr algn="ctr" indent="0" marL="0">
+            <a:pPr indent="0" marL="0">
               <a:buNone/>
             </a:pPr>
             <a:r>
-              <a:rPr lang="en-US" sz="1400" dirty="0">
-                <a:solidFill>
-                  <a:schemeClr val="tx2"/>
-                </a:solidFill>
-              </a:rPr>
-              <a:t>workbook checks against the engine, ALL PASS</a:t>
-            </a:r>
-            <a:endParaRPr lang="en-US" sz="1400" dirty="0"/>
-          </a:p>
-        </p:txBody>
-      </p:sp>
-      <p:sp>
-        <p:nvSpPr>
-          <p:cNvPr id="11" name="Stat card"/>
+              <a:rPr lang="en-US" sz="1500" dirty="0">
+                <a:solidFill>
+                  <a:schemeClr val="tx1"/>
+                </a:solidFill>
+              </a:rPr>
+              <a:t>Decisions are chosen and states are induced; every claim about a plan's value or feasibility is a simulation anyone can rerun.</a:t>
+            </a:r>
+            <a:endParaRPr lang="en-US" sz="1500" dirty="0"/>
+          </a:p>
+        </p:txBody>
+      </p:sp>
+      <p:sp>
+        <p:nvSpPr>
+          <p:cNvPr id="11" name="Number"/>
           <p:cNvSpPr/>
           <p:nvPr/>
         </p:nvSpPr>
         <p:spPr>
           <a:xfrm>
-            <a:off x="6233008" y="1691640"/>
-            <a:ext cx="2567864" cy="1691640"/>
-          </a:xfrm>
-          <a:prstGeom prst="roundRect">
-            <a:avLst>
-              <a:gd name="adj" fmla="val 4324"/>
-            </a:avLst>
+            <a:off x="548640" y="3529584"/>
+            <a:ext cx="566928" cy="566928"/>
+          </a:xfrm>
+          <a:prstGeom prst="ellipse">
+            <a:avLst/>
           </a:prstGeom>
           <a:solidFill>
-            <a:schemeClr val="bg2"/>
+            <a:schemeClr val="accent1"/>
           </a:solidFill>
-          <a:ln w="9525">
+          <a:ln w="6350">
             <a:solidFill>
-              <a:srgbClr val="C4CBD8"/>
+              <a:schemeClr val="accent1"/>
             </a:solidFill>
             <a:prstDash val="solid"/>
           </a:ln>
@@ -19037,14 +19453,14 @@
       </p:sp>
       <p:sp>
         <p:nvSpPr>
-          <p:cNvPr id="12" name="Stat value"/>
+          <p:cNvPr id="12" name="Text 9"/>
           <p:cNvSpPr txBox="1"/>
           <p:nvPr/>
         </p:nvSpPr>
         <p:spPr>
           <a:xfrm>
-            <a:off x="6370168" y="1801368"/>
-            <a:ext cx="2293544" cy="914400"/>
+            <a:off x="548640" y="3529584"/>
+            <a:ext cx="566928" cy="566928"/>
           </a:xfrm>
           <a:prstGeom prst="rect">
             <a:avLst/>
@@ -19060,30 +19476,30 @@
               <a:buNone/>
             </a:pPr>
             <a:r>
-              <a:rPr lang="en-US" sz="4400" b="1" dirty="0">
-                <a:solidFill>
-                  <a:schemeClr val="tx1"/>
-                </a:solidFill>
-                <a:latin typeface="Cambria" pitchFamily="34" charset="0"/>
-                <a:ea typeface="Cambria" pitchFamily="34" charset="-122"/>
-                <a:cs typeface="Cambria" pitchFamily="34" charset="-120"/>
-              </a:rPr>
-              <a:t>26202</a:t>
-            </a:r>
-            <a:endParaRPr lang="en-US" sz="4400" dirty="0"/>
-          </a:p>
-        </p:txBody>
-      </p:sp>
-      <p:sp>
-        <p:nvSpPr>
-          <p:cNvPr id="13" name="Stat label"/>
+              <a:rPr lang="en-US" sz="1500" b="1" dirty="0">
+                <a:solidFill>
+                  <a:schemeClr val="bg1"/>
+                </a:solidFill>
+                <a:latin typeface="Calibri" pitchFamily="34" charset="0"/>
+                <a:ea typeface="Calibri" pitchFamily="34" charset="-122"/>
+                <a:cs typeface="Calibri" pitchFamily="34" charset="-120"/>
+              </a:rPr>
+              <a:t>3</a:t>
+            </a:r>
+            <a:endParaRPr lang="en-US" sz="1500" dirty="0"/>
+          </a:p>
+        </p:txBody>
+      </p:sp>
+      <p:sp>
+        <p:nvSpPr>
+          <p:cNvPr id="13" name="Row text"/>
           <p:cNvSpPr txBox="1"/>
           <p:nvPr/>
         </p:nvSpPr>
         <p:spPr>
           <a:xfrm>
-            <a:off x="6370168" y="2697480"/>
-            <a:ext cx="2293544" cy="612648"/>
+            <a:off x="1325880" y="3483864"/>
+            <a:ext cx="10317175" cy="841248"/>
           </a:xfrm>
           <a:prstGeom prst="rect">
             <a:avLst/>
@@ -19092,46 +19508,44 @@
           <a:ln/>
         </p:spPr>
         <p:txBody>
-          <a:bodyPr wrap="square" lIns="0" tIns="0" rIns="0" bIns="0" rtlCol="0" anchor="t"/>
+          <a:bodyPr wrap="square" lIns="0" tIns="0" rIns="0" bIns="0" rtlCol="0" anchor="ctr"/>
           <a:lstStyle/>
           <a:p>
-            <a:pPr algn="ctr" indent="0" marL="0">
+            <a:pPr indent="0" marL="0">
               <a:buNone/>
             </a:pPr>
             <a:r>
-              <a:rPr lang="en-US" sz="1400" dirty="0">
-                <a:solidFill>
-                  <a:schemeClr val="tx2"/>
-                </a:solidFill>
-              </a:rPr>
-              <a:t>the lab's seed</a:t>
-            </a:r>
-            <a:endParaRPr lang="en-US" sz="1400" dirty="0"/>
-          </a:p>
-        </p:txBody>
-      </p:sp>
-      <p:sp>
-        <p:nvSpPr>
-          <p:cNvPr id="14" name="Stat card"/>
+              <a:rPr lang="en-US" sz="1500" dirty="0">
+                <a:solidFill>
+                  <a:schemeClr val="tx1"/>
+                </a:solidFill>
+              </a:rPr>
+              <a:t>How an objective is written is free; what it counts is governance. Running and terminal forms interconvert and units change nothing, but the terminal credit, the weights, the horizon, and a commitment's quantifier can each change the answer.</a:t>
+            </a:r>
+            <a:endParaRPr lang="en-US" sz="1500" dirty="0"/>
+          </a:p>
+        </p:txBody>
+      </p:sp>
+      <p:sp>
+        <p:nvSpPr>
+          <p:cNvPr id="14" name="Number"/>
           <p:cNvSpPr/>
           <p:nvPr/>
         </p:nvSpPr>
         <p:spPr>
           <a:xfrm>
-            <a:off x="9075191" y="1691640"/>
-            <a:ext cx="2567864" cy="1691640"/>
-          </a:xfrm>
-          <a:prstGeom prst="roundRect">
-            <a:avLst>
-              <a:gd name="adj" fmla="val 4324"/>
-            </a:avLst>
+            <a:off x="548640" y="4425696"/>
+            <a:ext cx="566928" cy="566928"/>
+          </a:xfrm>
+          <a:prstGeom prst="ellipse">
+            <a:avLst/>
           </a:prstGeom>
           <a:solidFill>
-            <a:schemeClr val="bg2"/>
+            <a:schemeClr val="accent1"/>
           </a:solidFill>
-          <a:ln w="9525">
+          <a:ln w="6350">
             <a:solidFill>
-              <a:srgbClr val="C4CBD8"/>
+              <a:schemeClr val="accent1"/>
             </a:solidFill>
             <a:prstDash val="solid"/>
           </a:ln>
@@ -19139,14 +19553,14 @@
       </p:sp>
       <p:sp>
         <p:nvSpPr>
-          <p:cNvPr id="15" name="Stat value"/>
+          <p:cNvPr id="15" name="Text 12"/>
           <p:cNvSpPr txBox="1"/>
           <p:nvPr/>
         </p:nvSpPr>
         <p:spPr>
           <a:xfrm>
-            <a:off x="9212351" y="1801368"/>
-            <a:ext cx="2293544" cy="914400"/>
+            <a:off x="548640" y="4425696"/>
+            <a:ext cx="566928" cy="566928"/>
           </a:xfrm>
           <a:prstGeom prst="rect">
             <a:avLst/>
@@ -19162,30 +19576,30 @@
               <a:buNone/>
             </a:pPr>
             <a:r>
-              <a:rPr lang="en-US" sz="3000" b="1" dirty="0">
-                <a:solidFill>
-                  <a:schemeClr val="tx1"/>
-                </a:solidFill>
-                <a:latin typeface="Cambria" pitchFamily="34" charset="0"/>
-                <a:ea typeface="Cambria" pitchFamily="34" charset="-122"/>
-                <a:cs typeface="Cambria" pitchFamily="34" charset="-120"/>
-              </a:rPr>
-              <a:t>AXIOM-02</a:t>
-            </a:r>
-            <a:endParaRPr lang="en-US" sz="3000" dirty="0"/>
-          </a:p>
-        </p:txBody>
-      </p:sp>
-      <p:sp>
-        <p:nvSpPr>
-          <p:cNvPr id="16" name="Stat label"/>
+              <a:rPr lang="en-US" sz="1500" b="1" dirty="0">
+                <a:solidFill>
+                  <a:schemeClr val="bg1"/>
+                </a:solidFill>
+                <a:latin typeface="Calibri" pitchFamily="34" charset="0"/>
+                <a:ea typeface="Calibri" pitchFamily="34" charset="-122"/>
+                <a:cs typeface="Calibri" pitchFamily="34" charset="-120"/>
+              </a:rPr>
+              <a:t>4</a:t>
+            </a:r>
+            <a:endParaRPr lang="en-US" sz="1500" dirty="0"/>
+          </a:p>
+        </p:txBody>
+      </p:sp>
+      <p:sp>
+        <p:nvSpPr>
+          <p:cNvPr id="16" name="Row text"/>
           <p:cNvSpPr txBox="1"/>
           <p:nvPr/>
         </p:nvSpPr>
         <p:spPr>
           <a:xfrm>
-            <a:off x="9212351" y="2697480"/>
-            <a:ext cx="2293544" cy="612648"/>
+            <a:off x="1325880" y="4379976"/>
+            <a:ext cx="10317175" cy="841248"/>
           </a:xfrm>
           <a:prstGeom prst="rect">
             <a:avLst/>
@@ -19194,34 +19608,98 @@
           <a:ln/>
         </p:spPr>
         <p:txBody>
-          <a:bodyPr wrap="square" lIns="0" tIns="0" rIns="0" bIns="0" rtlCol="0" anchor="t"/>
+          <a:bodyPr wrap="square" lIns="0" tIns="0" rIns="0" bIns="0" rtlCol="0" anchor="ctr"/>
+          <a:lstStyle/>
+          <a:p>
+            <a:pPr indent="0" marL="0">
+              <a:buNone/>
+            </a:pPr>
+            <a:r>
+              <a:rPr lang="en-US" sz="1500" dirty="0">
+                <a:solidFill>
+                  <a:schemeClr val="tx1"/>
+                </a:solidFill>
+              </a:rPr>
+              <a:t>Convexity is read block by block and dies at lumpy decisions, nonlinear dynamics, nonconvex commitments, and feedback rules; infeasibility is diagnosed as named clashes and a date, and a repair must break every clash.</a:t>
+            </a:r>
+            <a:endParaRPr lang="en-US" sz="1500" dirty="0"/>
+          </a:p>
+        </p:txBody>
+      </p:sp>
+      <p:sp>
+        <p:nvSpPr>
+          <p:cNvPr id="17" name="Number"/>
+          <p:cNvSpPr/>
+          <p:nvPr/>
+        </p:nvSpPr>
+        <p:spPr>
+          <a:xfrm>
+            <a:off x="548640" y="5321808"/>
+            <a:ext cx="566928" cy="566928"/>
+          </a:xfrm>
+          <a:prstGeom prst="ellipse">
+            <a:avLst/>
+          </a:prstGeom>
+          <a:solidFill>
+            <a:schemeClr val="accent1"/>
+          </a:solidFill>
+          <a:ln w="6350">
+            <a:solidFill>
+              <a:schemeClr val="accent1"/>
+            </a:solidFill>
+            <a:prstDash val="solid"/>
+          </a:ln>
+        </p:spPr>
+      </p:sp>
+      <p:sp>
+        <p:nvSpPr>
+          <p:cNvPr id="18" name="Text 15"/>
+          <p:cNvSpPr txBox="1"/>
+          <p:nvPr/>
+        </p:nvSpPr>
+        <p:spPr>
+          <a:xfrm>
+            <a:off x="548640" y="5321808"/>
+            <a:ext cx="566928" cy="566928"/>
+          </a:xfrm>
+          <a:prstGeom prst="rect">
+            <a:avLst/>
+          </a:prstGeom>
+          <a:noFill/>
+          <a:ln/>
+        </p:spPr>
+        <p:txBody>
+          <a:bodyPr wrap="square" lIns="0" tIns="0" rIns="0" bIns="0" rtlCol="0" anchor="ctr"/>
           <a:lstStyle/>
           <a:p>
             <a:pPr algn="ctr" indent="0" marL="0">
               <a:buNone/>
             </a:pPr>
             <a:r>
-              <a:rPr lang="en-US" sz="1400" dirty="0">
-                <a:solidFill>
-                  <a:schemeClr val="tx2"/>
-                </a:solidFill>
-              </a:rPr>
-              <a:t>AXIOM Lab 2.2</a:t>
-            </a:r>
-            <a:endParaRPr lang="en-US" sz="1400" dirty="0"/>
-          </a:p>
-        </p:txBody>
-      </p:sp>
-      <p:sp>
-        <p:nvSpPr>
-          <p:cNvPr id="17" name="Bullets"/>
+              <a:rPr lang="en-US" sz="1500" b="1" dirty="0">
+                <a:solidFill>
+                  <a:schemeClr val="bg1"/>
+                </a:solidFill>
+                <a:latin typeface="Calibri" pitchFamily="34" charset="0"/>
+                <a:ea typeface="Calibri" pitchFamily="34" charset="-122"/>
+                <a:cs typeface="Calibri" pitchFamily="34" charset="-120"/>
+              </a:rPr>
+              <a:t>5</a:t>
+            </a:r>
+            <a:endParaRPr lang="en-US" sz="1500" dirty="0"/>
+          </a:p>
+        </p:txBody>
+      </p:sp>
+      <p:sp>
+        <p:nvSpPr>
+          <p:cNvPr id="19" name="Row text"/>
           <p:cNvSpPr txBox="1"/>
           <p:nvPr/>
         </p:nvSpPr>
         <p:spPr>
           <a:xfrm>
-            <a:off x="548640" y="3703320"/>
-            <a:ext cx="11094415" cy="2468880"/>
+            <a:off x="1325880" y="5276088"/>
+            <a:ext cx="10317175" cy="841248"/>
           </a:xfrm>
           <a:prstGeom prst="rect">
             <a:avLst/>
@@ -19230,77 +19708,21 @@
           <a:ln/>
         </p:spPr>
         <p:txBody>
-          <a:bodyPr wrap="square" lIns="635" tIns="635" rIns="635" bIns="635" rtlCol="0" anchor="t"/>
+          <a:bodyPr wrap="square" lIns="0" tIns="0" rIns="0" bIns="0" rtlCol="0" anchor="ctr"/>
           <a:lstStyle/>
           <a:p>
-            <a:pPr marL="228600" indent="-228600">
-              <a:spcAft>
-                <a:spcPts val="800"/>
-              </a:spcAft>
-              <a:buSzPct val="100000"/>
-              <a:buChar char="•"/>
-            </a:pPr>
-            <a:r>
-              <a:rPr lang="en-US" sz="1700" b="1" dirty="0">
+            <a:pPr indent="0" marL="0">
+              <a:buNone/>
+            </a:pPr>
+            <a:r>
+              <a:rPr lang="en-US" sz="1500" dirty="0">
                 <a:solidFill>
                   <a:schemeClr val="tx1"/>
                 </a:solidFill>
               </a:rPr>
-              <a:t>Notebook</a:t>
-            </a:r>
-            <a:r>
-              <a:rPr lang="en-US" sz="1700" dirty="0">
-                <a:solidFill>
-                  <a:schemeClr val="tx1"/>
-                </a:solidFill>
-              </a:rPr>
-              <a:t> DCT_V2_Ch02_Lab.ipynb: Worked Example 2.1 and the lab's five steps in seven panels, with Table 2.4 on the book's 100,000 paths, ready for Colab</a:t>
-            </a:r>
-            <a:endParaRPr lang="en-US" sz="1700" dirty="0"/>
-          </a:p>
-          <a:p>
-            <a:pPr marL="228600" indent="-228600">
-              <a:spcAft>
-                <a:spcPts val="800"/>
-              </a:spcAft>
-              <a:buSzPct val="100000"/>
-              <a:buChar char="•"/>
-            </a:pPr>
-            <a:r>
-              <a:rPr lang="en-US" sz="1700" b="1" dirty="0">
-                <a:solidFill>
-                  <a:schemeClr val="tx1"/>
-                </a:solidFill>
-              </a:rPr>
-              <a:t>Workbook</a:t>
-            </a:r>
-            <a:r>
-              <a:rPr lang="en-US" sz="1700" dirty="0">
-                <a:solidFill>
-                  <a:schemeClr val="tx1"/>
-                </a:solidFill>
-              </a:rPr>
-              <a:t> DCT_V2_Ch02_Lab.xlsx: the instance card, the 64 schedules, the deletion filter, the repairs, the optimizer and the standard form, in formulas</a:t>
-            </a:r>
-            <a:endParaRPr lang="en-US" sz="1700" dirty="0"/>
-          </a:p>
-          <a:p>
-            <a:pPr marL="228600" indent="-228600">
-              <a:spcAft>
-                <a:spcPts val="800"/>
-              </a:spcAft>
-              <a:buSzPct val="100000"/>
-              <a:buChar char="•"/>
-            </a:pPr>
-            <a:r>
-              <a:rPr lang="en-US" sz="1700" dirty="0">
-                <a:solidFill>
-                  <a:schemeClr val="tx1"/>
-                </a:solidFill>
-              </a:rPr>
-              <a:t>Every number on these slides is the book's, and both companions check it</a:t>
-            </a:r>
-            <a:endParaRPr lang="en-US" sz="1700" dirty="0"/>
+              <a:t>Classes route instances to methods, preparation makes them solvable, and a certified instance is owed an optimum, checkable conditions, prices, and stable values, whatever method solves it.</a:t>
+            </a:r>
+            <a:endParaRPr lang="en-US" sz="1500" dirty="0"/>
           </a:p>
         </p:txBody>
       </p:sp>
@@ -19406,6 +19828,655 @@
                   <a:schemeClr val="accent1"/>
                 </a:solidFill>
               </a:rPr>
+              <a:t>THIS WEEK'S LABORATORY</a:t>
+            </a:r>
+            <a:endParaRPr lang="en-US" sz="1200" dirty="0"/>
+          </a:p>
+        </p:txBody>
+      </p:sp>
+      <p:sp>
+        <p:nvSpPr>
+          <p:cNvPr id="4" name="Text 1"/>
+          <p:cNvSpPr/>
+          <p:nvPr>
+            <p:ph idx="103" type="title" hasCustomPrompt="1"/>
+          </p:nvPr>
+        </p:nvSpPr>
+        <p:spPr>
+          <a:xfrm>
+            <a:off x="548640" y="658368"/>
+            <a:ext cx="11094415" cy="868680"/>
+          </a:xfrm>
+          <a:prstGeom prst="rect">
+            <a:avLst/>
+          </a:prstGeom>
+          <a:noFill/>
+          <a:ln/>
+        </p:spPr>
+        <p:txBody>
+          <a:bodyPr wrap="square" lIns="0" tIns="0" rIns="0" bIns="0" rtlCol="0" anchor="t"/>
+          <a:lstStyle/>
+          <a:p>
+            <a:pPr algn="l" indent="0" marL="0">
+              <a:buNone/>
+            </a:pPr>
+            <a:r>
+              <a:rPr lang="en-US" sz="3200" b="1" dirty="0">
+                <a:solidFill>
+                  <a:schemeClr val="tx1"/>
+                </a:solidFill>
+                <a:latin typeface="Cambria" pitchFamily="34" charset="0"/>
+                <a:ea typeface="Cambria" pitchFamily="34" charset="-122"/>
+                <a:cs typeface="Cambria" pitchFamily="34" charset="-120"/>
+              </a:rPr>
+              <a:t>Notebook and workbook reproduce the book</a:t>
+            </a:r>
+            <a:endParaRPr lang="en-US" sz="3200" dirty="0"/>
+          </a:p>
+        </p:txBody>
+      </p:sp>
+      <p:sp>
+        <p:nvSpPr>
+          <p:cNvPr id="5" name="Stat card"/>
+          <p:cNvSpPr/>
+          <p:nvPr/>
+        </p:nvSpPr>
+        <p:spPr>
+          <a:xfrm>
+            <a:off x="548640" y="1691640"/>
+            <a:ext cx="2567864" cy="1691640"/>
+          </a:xfrm>
+          <a:prstGeom prst="roundRect">
+            <a:avLst>
+              <a:gd name="adj" fmla="val 4324"/>
+            </a:avLst>
+          </a:prstGeom>
+          <a:solidFill>
+            <a:schemeClr val="tx1"/>
+          </a:solidFill>
+          <a:ln w="9525">
+            <a:solidFill>
+              <a:srgbClr val="0F1E3D"/>
+            </a:solidFill>
+            <a:prstDash val="solid"/>
+          </a:ln>
+        </p:spPr>
+      </p:sp>
+      <p:sp>
+        <p:nvSpPr>
+          <p:cNvPr id="6" name="Stat value"/>
+          <p:cNvSpPr txBox="1"/>
+          <p:nvPr/>
+        </p:nvSpPr>
+        <p:spPr>
+          <a:xfrm>
+            <a:off x="685800" y="1801368"/>
+            <a:ext cx="2293544" cy="914400"/>
+          </a:xfrm>
+          <a:prstGeom prst="rect">
+            <a:avLst/>
+          </a:prstGeom>
+          <a:noFill/>
+          <a:ln/>
+        </p:spPr>
+        <p:txBody>
+          <a:bodyPr wrap="square" lIns="0" tIns="0" rIns="0" bIns="0" rtlCol="0" anchor="ctr"/>
+          <a:lstStyle/>
+          <a:p>
+            <a:pPr algn="ctr" indent="0" marL="0">
+              <a:buNone/>
+            </a:pPr>
+            <a:r>
+              <a:rPr lang="en-US" sz="4400" b="1" dirty="0">
+                <a:solidFill>
+                  <a:schemeClr val="accent1"/>
+                </a:solidFill>
+                <a:latin typeface="Cambria" pitchFamily="34" charset="0"/>
+                <a:ea typeface="Cambria" pitchFamily="34" charset="-122"/>
+                <a:cs typeface="Cambria" pitchFamily="34" charset="-120"/>
+              </a:rPr>
+              <a:t>55</a:t>
+            </a:r>
+            <a:endParaRPr lang="en-US" sz="4400" dirty="0"/>
+          </a:p>
+        </p:txBody>
+      </p:sp>
+      <p:sp>
+        <p:nvSpPr>
+          <p:cNvPr id="7" name="Stat label"/>
+          <p:cNvSpPr txBox="1"/>
+          <p:nvPr/>
+        </p:nvSpPr>
+        <p:spPr>
+          <a:xfrm>
+            <a:off x="685800" y="2697480"/>
+            <a:ext cx="2293544" cy="612648"/>
+          </a:xfrm>
+          <a:prstGeom prst="rect">
+            <a:avLst/>
+          </a:prstGeom>
+          <a:noFill/>
+          <a:ln/>
+        </p:spPr>
+        <p:txBody>
+          <a:bodyPr wrap="square" lIns="0" tIns="0" rIns="0" bIns="0" rtlCol="0" anchor="t"/>
+          <a:lstStyle/>
+          <a:p>
+            <a:pPr algn="ctr" indent="0" marL="0">
+              <a:buNone/>
+            </a:pPr>
+            <a:r>
+              <a:rPr lang="en-US" sz="1400" dirty="0">
+                <a:solidFill>
+                  <a:schemeClr val="bg2"/>
+                </a:solidFill>
+              </a:rPr>
+              <a:t>notebook checkpoints, every one PASS</a:t>
+            </a:r>
+            <a:endParaRPr lang="en-US" sz="1400" dirty="0"/>
+          </a:p>
+        </p:txBody>
+      </p:sp>
+      <p:sp>
+        <p:nvSpPr>
+          <p:cNvPr id="8" name="Stat card"/>
+          <p:cNvSpPr/>
+          <p:nvPr/>
+        </p:nvSpPr>
+        <p:spPr>
+          <a:xfrm>
+            <a:off x="3390824" y="1691640"/>
+            <a:ext cx="2567864" cy="1691640"/>
+          </a:xfrm>
+          <a:prstGeom prst="roundRect">
+            <a:avLst>
+              <a:gd name="adj" fmla="val 4324"/>
+            </a:avLst>
+          </a:prstGeom>
+          <a:solidFill>
+            <a:schemeClr val="bg2"/>
+          </a:solidFill>
+          <a:ln w="9525">
+            <a:solidFill>
+              <a:srgbClr val="C4CBD8"/>
+            </a:solidFill>
+            <a:prstDash val="solid"/>
+          </a:ln>
+        </p:spPr>
+      </p:sp>
+      <p:sp>
+        <p:nvSpPr>
+          <p:cNvPr id="9" name="Stat value"/>
+          <p:cNvSpPr txBox="1"/>
+          <p:nvPr/>
+        </p:nvSpPr>
+        <p:spPr>
+          <a:xfrm>
+            <a:off x="3527984" y="1801368"/>
+            <a:ext cx="2293544" cy="914400"/>
+          </a:xfrm>
+          <a:prstGeom prst="rect">
+            <a:avLst/>
+          </a:prstGeom>
+          <a:noFill/>
+          <a:ln/>
+        </p:spPr>
+        <p:txBody>
+          <a:bodyPr wrap="square" lIns="0" tIns="0" rIns="0" bIns="0" rtlCol="0" anchor="ctr"/>
+          <a:lstStyle/>
+          <a:p>
+            <a:pPr algn="ctr" indent="0" marL="0">
+              <a:buNone/>
+            </a:pPr>
+            <a:r>
+              <a:rPr lang="en-US" sz="4400" b="1" dirty="0">
+                <a:solidFill>
+                  <a:schemeClr val="tx1"/>
+                </a:solidFill>
+                <a:latin typeface="Cambria" pitchFamily="34" charset="0"/>
+                <a:ea typeface="Cambria" pitchFamily="34" charset="-122"/>
+                <a:cs typeface="Cambria" pitchFamily="34" charset="-120"/>
+              </a:rPr>
+              <a:t>66</a:t>
+            </a:r>
+            <a:endParaRPr lang="en-US" sz="4400" dirty="0"/>
+          </a:p>
+        </p:txBody>
+      </p:sp>
+      <p:sp>
+        <p:nvSpPr>
+          <p:cNvPr id="10" name="Stat label"/>
+          <p:cNvSpPr txBox="1"/>
+          <p:nvPr/>
+        </p:nvSpPr>
+        <p:spPr>
+          <a:xfrm>
+            <a:off x="3527984" y="2697480"/>
+            <a:ext cx="2293544" cy="612648"/>
+          </a:xfrm>
+          <a:prstGeom prst="rect">
+            <a:avLst/>
+          </a:prstGeom>
+          <a:noFill/>
+          <a:ln/>
+        </p:spPr>
+        <p:txBody>
+          <a:bodyPr wrap="square" lIns="0" tIns="0" rIns="0" bIns="0" rtlCol="0" anchor="t"/>
+          <a:lstStyle/>
+          <a:p>
+            <a:pPr algn="ctr" indent="0" marL="0">
+              <a:buNone/>
+            </a:pPr>
+            <a:r>
+              <a:rPr lang="en-US" sz="1400" dirty="0">
+                <a:solidFill>
+                  <a:schemeClr val="tx2"/>
+                </a:solidFill>
+              </a:rPr>
+              <a:t>workbook checks against the engine, ALL PASS</a:t>
+            </a:r>
+            <a:endParaRPr lang="en-US" sz="1400" dirty="0"/>
+          </a:p>
+        </p:txBody>
+      </p:sp>
+      <p:sp>
+        <p:nvSpPr>
+          <p:cNvPr id="11" name="Stat card"/>
+          <p:cNvSpPr/>
+          <p:nvPr/>
+        </p:nvSpPr>
+        <p:spPr>
+          <a:xfrm>
+            <a:off x="6233008" y="1691640"/>
+            <a:ext cx="2567864" cy="1691640"/>
+          </a:xfrm>
+          <a:prstGeom prst="roundRect">
+            <a:avLst>
+              <a:gd name="adj" fmla="val 4324"/>
+            </a:avLst>
+          </a:prstGeom>
+          <a:solidFill>
+            <a:schemeClr val="bg2"/>
+          </a:solidFill>
+          <a:ln w="9525">
+            <a:solidFill>
+              <a:srgbClr val="C4CBD8"/>
+            </a:solidFill>
+            <a:prstDash val="solid"/>
+          </a:ln>
+        </p:spPr>
+      </p:sp>
+      <p:sp>
+        <p:nvSpPr>
+          <p:cNvPr id="12" name="Stat value"/>
+          <p:cNvSpPr txBox="1"/>
+          <p:nvPr/>
+        </p:nvSpPr>
+        <p:spPr>
+          <a:xfrm>
+            <a:off x="6370168" y="1801368"/>
+            <a:ext cx="2293544" cy="914400"/>
+          </a:xfrm>
+          <a:prstGeom prst="rect">
+            <a:avLst/>
+          </a:prstGeom>
+          <a:noFill/>
+          <a:ln/>
+        </p:spPr>
+        <p:txBody>
+          <a:bodyPr wrap="square" lIns="0" tIns="0" rIns="0" bIns="0" rtlCol="0" anchor="ctr"/>
+          <a:lstStyle/>
+          <a:p>
+            <a:pPr algn="ctr" indent="0" marL="0">
+              <a:buNone/>
+            </a:pPr>
+            <a:r>
+              <a:rPr lang="en-US" sz="4400" b="1" dirty="0">
+                <a:solidFill>
+                  <a:schemeClr val="tx1"/>
+                </a:solidFill>
+                <a:latin typeface="Cambria" pitchFamily="34" charset="0"/>
+                <a:ea typeface="Cambria" pitchFamily="34" charset="-122"/>
+                <a:cs typeface="Cambria" pitchFamily="34" charset="-120"/>
+              </a:rPr>
+              <a:t>26202</a:t>
+            </a:r>
+            <a:endParaRPr lang="en-US" sz="4400" dirty="0"/>
+          </a:p>
+        </p:txBody>
+      </p:sp>
+      <p:sp>
+        <p:nvSpPr>
+          <p:cNvPr id="13" name="Stat label"/>
+          <p:cNvSpPr txBox="1"/>
+          <p:nvPr/>
+        </p:nvSpPr>
+        <p:spPr>
+          <a:xfrm>
+            <a:off x="6370168" y="2697480"/>
+            <a:ext cx="2293544" cy="612648"/>
+          </a:xfrm>
+          <a:prstGeom prst="rect">
+            <a:avLst/>
+          </a:prstGeom>
+          <a:noFill/>
+          <a:ln/>
+        </p:spPr>
+        <p:txBody>
+          <a:bodyPr wrap="square" lIns="0" tIns="0" rIns="0" bIns="0" rtlCol="0" anchor="t"/>
+          <a:lstStyle/>
+          <a:p>
+            <a:pPr algn="ctr" indent="0" marL="0">
+              <a:buNone/>
+            </a:pPr>
+            <a:r>
+              <a:rPr lang="en-US" sz="1400" dirty="0">
+                <a:solidFill>
+                  <a:schemeClr val="tx2"/>
+                </a:solidFill>
+              </a:rPr>
+              <a:t>the lab's seed</a:t>
+            </a:r>
+            <a:endParaRPr lang="en-US" sz="1400" dirty="0"/>
+          </a:p>
+        </p:txBody>
+      </p:sp>
+      <p:sp>
+        <p:nvSpPr>
+          <p:cNvPr id="14" name="Stat card"/>
+          <p:cNvSpPr/>
+          <p:nvPr/>
+        </p:nvSpPr>
+        <p:spPr>
+          <a:xfrm>
+            <a:off x="9075191" y="1691640"/>
+            <a:ext cx="2567864" cy="1691640"/>
+          </a:xfrm>
+          <a:prstGeom prst="roundRect">
+            <a:avLst>
+              <a:gd name="adj" fmla="val 4324"/>
+            </a:avLst>
+          </a:prstGeom>
+          <a:solidFill>
+            <a:schemeClr val="bg2"/>
+          </a:solidFill>
+          <a:ln w="9525">
+            <a:solidFill>
+              <a:srgbClr val="C4CBD8"/>
+            </a:solidFill>
+            <a:prstDash val="solid"/>
+          </a:ln>
+        </p:spPr>
+      </p:sp>
+      <p:sp>
+        <p:nvSpPr>
+          <p:cNvPr id="15" name="Stat value"/>
+          <p:cNvSpPr txBox="1"/>
+          <p:nvPr/>
+        </p:nvSpPr>
+        <p:spPr>
+          <a:xfrm>
+            <a:off x="9212351" y="1801368"/>
+            <a:ext cx="2293544" cy="914400"/>
+          </a:xfrm>
+          <a:prstGeom prst="rect">
+            <a:avLst/>
+          </a:prstGeom>
+          <a:noFill/>
+          <a:ln/>
+        </p:spPr>
+        <p:txBody>
+          <a:bodyPr wrap="square" lIns="0" tIns="0" rIns="0" bIns="0" rtlCol="0" anchor="ctr"/>
+          <a:lstStyle/>
+          <a:p>
+            <a:pPr algn="ctr" indent="0" marL="0">
+              <a:buNone/>
+            </a:pPr>
+            <a:r>
+              <a:rPr lang="en-US" sz="3000" b="1" dirty="0">
+                <a:solidFill>
+                  <a:schemeClr val="tx1"/>
+                </a:solidFill>
+                <a:latin typeface="Cambria" pitchFamily="34" charset="0"/>
+                <a:ea typeface="Cambria" pitchFamily="34" charset="-122"/>
+                <a:cs typeface="Cambria" pitchFamily="34" charset="-120"/>
+              </a:rPr>
+              <a:t>AXIOM-02</a:t>
+            </a:r>
+            <a:endParaRPr lang="en-US" sz="3000" dirty="0"/>
+          </a:p>
+        </p:txBody>
+      </p:sp>
+      <p:sp>
+        <p:nvSpPr>
+          <p:cNvPr id="16" name="Stat label"/>
+          <p:cNvSpPr txBox="1"/>
+          <p:nvPr/>
+        </p:nvSpPr>
+        <p:spPr>
+          <a:xfrm>
+            <a:off x="9212351" y="2697480"/>
+            <a:ext cx="2293544" cy="612648"/>
+          </a:xfrm>
+          <a:prstGeom prst="rect">
+            <a:avLst/>
+          </a:prstGeom>
+          <a:noFill/>
+          <a:ln/>
+        </p:spPr>
+        <p:txBody>
+          <a:bodyPr wrap="square" lIns="0" tIns="0" rIns="0" bIns="0" rtlCol="0" anchor="t"/>
+          <a:lstStyle/>
+          <a:p>
+            <a:pPr algn="ctr" indent="0" marL="0">
+              <a:buNone/>
+            </a:pPr>
+            <a:r>
+              <a:rPr lang="en-US" sz="1400" dirty="0">
+                <a:solidFill>
+                  <a:schemeClr val="tx2"/>
+                </a:solidFill>
+              </a:rPr>
+              <a:t>AXIOM Lab 2.2</a:t>
+            </a:r>
+            <a:endParaRPr lang="en-US" sz="1400" dirty="0"/>
+          </a:p>
+        </p:txBody>
+      </p:sp>
+      <p:sp>
+        <p:nvSpPr>
+          <p:cNvPr id="17" name="Bullets"/>
+          <p:cNvSpPr txBox="1"/>
+          <p:nvPr/>
+        </p:nvSpPr>
+        <p:spPr>
+          <a:xfrm>
+            <a:off x="548640" y="3703320"/>
+            <a:ext cx="11094415" cy="2468880"/>
+          </a:xfrm>
+          <a:prstGeom prst="rect">
+            <a:avLst/>
+          </a:prstGeom>
+          <a:noFill/>
+          <a:ln/>
+        </p:spPr>
+        <p:txBody>
+          <a:bodyPr wrap="square" lIns="635" tIns="635" rIns="635" bIns="635" rtlCol="0" anchor="t"/>
+          <a:lstStyle/>
+          <a:p>
+            <a:pPr marL="228600" indent="-228600">
+              <a:spcAft>
+                <a:spcPts val="800"/>
+              </a:spcAft>
+              <a:buSzPct val="100000"/>
+              <a:buChar char="•"/>
+            </a:pPr>
+            <a:r>
+              <a:rPr lang="en-US" sz="1700" b="1" dirty="0">
+                <a:solidFill>
+                  <a:schemeClr val="tx1"/>
+                </a:solidFill>
+              </a:rPr>
+              <a:t>Notebook</a:t>
+            </a:r>
+            <a:r>
+              <a:rPr lang="en-US" sz="1700" dirty="0">
+                <a:solidFill>
+                  <a:schemeClr val="tx1"/>
+                </a:solidFill>
+              </a:rPr>
+              <a:t> DCT_V2_Ch02_Lab.ipynb: Worked Example 2.1 and the lab's five steps in seven panels, with Table 2.4 on the book's 100,000 paths, ready for Colab</a:t>
+            </a:r>
+            <a:endParaRPr lang="en-US" sz="1700" dirty="0"/>
+          </a:p>
+          <a:p>
+            <a:pPr marL="228600" indent="-228600">
+              <a:spcAft>
+                <a:spcPts val="800"/>
+              </a:spcAft>
+              <a:buSzPct val="100000"/>
+              <a:buChar char="•"/>
+            </a:pPr>
+            <a:r>
+              <a:rPr lang="en-US" sz="1700" b="1" dirty="0">
+                <a:solidFill>
+                  <a:schemeClr val="tx1"/>
+                </a:solidFill>
+              </a:rPr>
+              <a:t>Workbook</a:t>
+            </a:r>
+            <a:r>
+              <a:rPr lang="en-US" sz="1700" dirty="0">
+                <a:solidFill>
+                  <a:schemeClr val="tx1"/>
+                </a:solidFill>
+              </a:rPr>
+              <a:t> DCT_V2_Ch02_Lab.xlsx: the instance card, the 64 schedules, the deletion filter, the repairs, the optimizer and the standard form, in formulas</a:t>
+            </a:r>
+            <a:endParaRPr lang="en-US" sz="1700" dirty="0"/>
+          </a:p>
+          <a:p>
+            <a:pPr marL="228600" indent="-228600">
+              <a:spcAft>
+                <a:spcPts val="800"/>
+              </a:spcAft>
+              <a:buSzPct val="100000"/>
+              <a:buChar char="•"/>
+            </a:pPr>
+            <a:r>
+              <a:rPr lang="en-US" sz="1700" dirty="0">
+                <a:solidFill>
+                  <a:schemeClr val="tx1"/>
+                </a:solidFill>
+              </a:rPr>
+              <a:t>Every number on these slides is the book's, and both companions check it</a:t>
+            </a:r>
+            <a:endParaRPr lang="en-US" sz="1700" dirty="0"/>
+          </a:p>
+        </p:txBody>
+      </p:sp>
+      <p:sp>
+        <p:nvSpPr>
+          <p:cNvPr id="25" name="Slide Number Placeholder 0"/>
+          <p:cNvSpPr>
+            <a:spLocks noGrp="1"/>
+          </p:cNvSpPr>
+          <p:nvPr>
+            <p:ph type="sldNum" sz="quarter" idx="4294967295"/>
+          </p:nvPr>
+        </p:nvSpPr>
+        <p:spPr>
+          <a:xfrm>
+            <a:off x="11094415" y="6382512"/>
+            <a:ext cx="548640" cy="237744"/>
+          </a:xfrm>
+          <a:prstGeom prst="rect">
+            <a:avLst/>
+          </a:prstGeom>
+          <a:extLst>
+            <a:ext uri="{C572A759-6A51-4108-AA02-DFA0A04FC94B}">
+              <ma14:wrappingTextBoxFlag xmlns:ma14="http://schemas.microsoft.com/office/mac/drawingml/2011/main" val="0"/>
+            </a:ext>
+          </a:extLst>
+        </p:spPr>
+        <p:txBody>
+          <a:bodyPr/>
+          <a:lstStyle>
+            <a:lvl1pPr>
+              <a:defRPr sz="1000">
+                <a:solidFill>
+                  <a:srgbClr val="5A6B82"/>
+                </a:solidFill>
+              </a:defRPr>
+            </a:lvl1pPr>
+          </a:lstStyle>
+          <a:p>
+            <a:pPr algn="r"/>
+            <a:fld id="{F7021451-1387-4CA6-816F-3879F97B5CBC}" type="slidenum">
+              <a:rPr b="0" lang="en-US"/>
+              <a:t>24</a:t>
+            </a:fld>
+            <a:endParaRPr lang="en-US"/>
+          </a:p>
+        </p:txBody>
+      </p:sp>
+    </p:spTree>
+  </p:cSld>
+  <p:clrMapOvr>
+    <a:masterClrMapping/>
+  </p:clrMapOvr>
+</p:sld>
+</file>
+
+<file path=ppt/slides/slide25.xml><?xml version="1.0" encoding="utf-8"?>
+<p:sld xmlns:a="http://schemas.openxmlformats.org/drawingml/2006/main" xmlns:r="http://schemas.openxmlformats.org/officeDocument/2006/relationships" xmlns:p="http://schemas.openxmlformats.org/presentationml/2006/main">
+  <p:cSld name="Slide 25">
+    <p:spTree>
+      <p:nvGrpSpPr>
+        <p:cNvPr id="1" name=""/>
+        <p:cNvGrpSpPr/>
+        <p:nvPr/>
+      </p:nvGrpSpPr>
+      <p:grpSpPr>
+        <a:xfrm>
+          <a:off x="0" y="0"/>
+          <a:ext cx="0" cy="0"/>
+          <a:chOff x="0" y="0"/>
+          <a:chExt cx="0" cy="0"/>
+        </a:xfrm>
+      </p:grpSpPr>
+      <p:sp>
+        <p:nvSpPr>
+          <p:cNvPr id="3" name="Text 1"/>
+          <p:cNvSpPr/>
+          <p:nvPr>
+            <p:ph idx="102" type="body" hasCustomPrompt="1"/>
+          </p:nvPr>
+        </p:nvSpPr>
+        <p:spPr>
+          <a:xfrm>
+            <a:off x="548640" y="347472"/>
+            <a:ext cx="11094415" cy="292608"/>
+          </a:xfrm>
+          <a:prstGeom prst="rect">
+            <a:avLst/>
+          </a:prstGeom>
+          <a:noFill/>
+          <a:ln/>
+        </p:spPr>
+        <p:txBody>
+          <a:bodyPr wrap="square" lIns="0" tIns="0" rIns="0" bIns="0" rtlCol="0"/>
+          <a:lstStyle/>
+          <a:p>
+            <a:pPr indent="0" marL="0">
+              <a:buNone/>
+            </a:pPr>
+            <a:r>
+              <a:rPr lang="en-US" sz="1200" b="1" spc="200" kern="0" dirty="0">
+                <a:solidFill>
+                  <a:schemeClr val="accent1"/>
+                </a:solidFill>
+              </a:rPr>
               <a:t>NEXT · CHAPTER 3</a:t>
             </a:r>
             <a:endParaRPr lang="en-US" sz="1200" dirty="0"/>
@@ -19610,7 +20681,7 @@
             <a:pPr algn="r"/>
             <a:fld id="{F7021451-1387-4CA6-816F-3879F97B5CBC}" type="slidenum">
               <a:rPr b="0" lang="en-US"/>
-              <a:t>24</a:t>
+              <a:t>25</a:t>
             </a:fld>
             <a:endParaRPr lang="en-US"/>
           </a:p>
@@ -20363,7 +21434,7 @@
                 <a:ea typeface="Cambria" pitchFamily="34" charset="-122"/>
                 <a:cs typeface="Cambria" pitchFamily="34" charset="-120"/>
               </a:rPr>
-              <a:t>Seven sections, a worked example and a lab</a:t>
+              <a:t>Seven sections, a worked example, a case and a lab</a:t>
             </a:r>
             <a:endParaRPr lang="en-US" sz="3200" dirty="0"/>
           </a:p>
@@ -21530,7 +22601,7 @@
                   <a:schemeClr val="accent1"/>
                 </a:solidFill>
               </a:rPr>
-              <a:t>AXIOM Lab 2.2</a:t>
+              <a:t>In Practice</a:t>
             </a:r>
             <a:endParaRPr lang="en-US" sz="1300" dirty="0"/>
           </a:p>
@@ -21569,7 +22640,7 @@
                 <a:ea typeface="Cambria" pitchFamily="34" charset="-122"/>
                 <a:cs typeface="Cambria" pitchFamily="34" charset="-120"/>
               </a:rPr>
-              <a:t>Building and Diagnosing an Instance</a:t>
+              <a:t>Kellogg Declares Its Cereal Network</a:t>
             </a:r>
             <a:endParaRPr lang="en-US" sz="1300" dirty="0"/>
           </a:p>
@@ -21584,6 +22655,144 @@
         <p:spPr>
           <a:xfrm>
             <a:off x="7552761" y="5660136"/>
+            <a:ext cx="1633667" cy="384048"/>
+          </a:xfrm>
+          <a:prstGeom prst="rect">
+            <a:avLst/>
+          </a:prstGeom>
+          <a:noFill/>
+          <a:ln/>
+        </p:spPr>
+        <p:txBody>
+          <a:bodyPr wrap="square" lIns="0" tIns="0" rIns="0" bIns="0" rtlCol="0" anchor="t"/>
+          <a:lstStyle/>
+          <a:p>
+            <a:pPr indent="0" marL="0">
+              <a:buNone/>
+            </a:pPr>
+            <a:r>
+              <a:rPr lang="en-US" sz="1200" dirty="0">
+                <a:solidFill>
+                  <a:schemeClr val="tx2"/>
+                </a:solidFill>
+              </a:rPr>
+              <a:t>At a Glance · board questions</a:t>
+            </a:r>
+            <a:endParaRPr lang="en-US" sz="1200" dirty="0"/>
+          </a:p>
+        </p:txBody>
+      </p:sp>
+      <p:sp>
+        <p:nvSpPr>
+          <p:cNvPr id="41" name="Card"/>
+          <p:cNvSpPr/>
+          <p:nvPr/>
+        </p:nvSpPr>
+        <p:spPr>
+          <a:xfrm>
+            <a:off x="9643628" y="4069080"/>
+            <a:ext cx="1999427" cy="2103120"/>
+          </a:xfrm>
+          <a:prstGeom prst="roundRect">
+            <a:avLst>
+              <a:gd name="adj" fmla="val 3659"/>
+            </a:avLst>
+          </a:prstGeom>
+          <a:solidFill>
+            <a:schemeClr val="bg2"/>
+          </a:solidFill>
+          <a:ln w="9525">
+            <a:solidFill>
+              <a:srgbClr val="C4CBD8"/>
+            </a:solidFill>
+            <a:prstDash val="solid"/>
+          </a:ln>
+        </p:spPr>
+      </p:sp>
+      <p:sp>
+        <p:nvSpPr>
+          <p:cNvPr id="42" name="Card label"/>
+          <p:cNvSpPr txBox="1"/>
+          <p:nvPr/>
+        </p:nvSpPr>
+        <p:spPr>
+          <a:xfrm>
+            <a:off x="9826508" y="4197096"/>
+            <a:ext cx="1633667" cy="310896"/>
+          </a:xfrm>
+          <a:prstGeom prst="rect">
+            <a:avLst/>
+          </a:prstGeom>
+          <a:noFill/>
+          <a:ln/>
+        </p:spPr>
+        <p:txBody>
+          <a:bodyPr wrap="square" lIns="0" tIns="0" rIns="0" bIns="0" rtlCol="0" anchor="ctr"/>
+          <a:lstStyle/>
+          <a:p>
+            <a:pPr indent="0" marL="0">
+              <a:buNone/>
+            </a:pPr>
+            <a:r>
+              <a:rPr lang="en-US" sz="1300" b="1" dirty="0">
+                <a:solidFill>
+                  <a:schemeClr val="accent1"/>
+                </a:solidFill>
+              </a:rPr>
+              <a:t>AXIOM Lab 2.2</a:t>
+            </a:r>
+            <a:endParaRPr lang="en-US" sz="1300" dirty="0"/>
+          </a:p>
+        </p:txBody>
+      </p:sp>
+      <p:sp>
+        <p:nvSpPr>
+          <p:cNvPr id="43" name="Card head"/>
+          <p:cNvSpPr txBox="1"/>
+          <p:nvPr/>
+        </p:nvSpPr>
+        <p:spPr>
+          <a:xfrm>
+            <a:off x="9826508" y="4526280"/>
+            <a:ext cx="1633667" cy="1060704"/>
+          </a:xfrm>
+          <a:prstGeom prst="rect">
+            <a:avLst/>
+          </a:prstGeom>
+          <a:noFill/>
+          <a:ln/>
+        </p:spPr>
+        <p:txBody>
+          <a:bodyPr wrap="square" lIns="0" tIns="0" rIns="0" bIns="0" rtlCol="0" anchor="t"/>
+          <a:lstStyle/>
+          <a:p>
+            <a:pPr indent="0" marL="0">
+              <a:buNone/>
+            </a:pPr>
+            <a:r>
+              <a:rPr lang="en-US" sz="1300" b="1" dirty="0">
+                <a:solidFill>
+                  <a:schemeClr val="tx1"/>
+                </a:solidFill>
+                <a:latin typeface="Cambria" pitchFamily="34" charset="0"/>
+                <a:ea typeface="Cambria" pitchFamily="34" charset="-122"/>
+                <a:cs typeface="Cambria" pitchFamily="34" charset="-120"/>
+              </a:rPr>
+              <a:t>Building and Diagnosing an Instance</a:t>
+            </a:r>
+            <a:endParaRPr lang="en-US" sz="1300" dirty="0"/>
+          </a:p>
+        </p:txBody>
+      </p:sp>
+      <p:sp>
+        <p:nvSpPr>
+          <p:cNvPr id="44" name="Card text"/>
+          <p:cNvSpPr txBox="1"/>
+          <p:nvPr/>
+        </p:nvSpPr>
+        <p:spPr>
+          <a:xfrm>
+            <a:off x="9826508" y="5660136"/>
             <a:ext cx="1633667" cy="384048"/>
           </a:xfrm>
           <a:prstGeom prst="rect">
